--- a/Git.pptx
+++ b/Git.pptx
@@ -5,7 +5,7 @@
     <p:sldMasterId id="2147483648" r:id="rId1"/>
   </p:sldMasterIdLst>
   <p:notesMasterIdLst>
-    <p:notesMasterId r:id="rId24"/>
+    <p:notesMasterId r:id="rId25"/>
   </p:notesMasterIdLst>
   <p:sldIdLst>
     <p:sldId id="256" r:id="rId2"/>
@@ -13,23 +13,24 @@
     <p:sldId id="258" r:id="rId4"/>
     <p:sldId id="265" r:id="rId5"/>
     <p:sldId id="259" r:id="rId6"/>
-    <p:sldId id="266" r:id="rId7"/>
-    <p:sldId id="260" r:id="rId8"/>
-    <p:sldId id="268" r:id="rId9"/>
-    <p:sldId id="269" r:id="rId10"/>
-    <p:sldId id="272" r:id="rId11"/>
-    <p:sldId id="271" r:id="rId12"/>
-    <p:sldId id="273" r:id="rId13"/>
-    <p:sldId id="264" r:id="rId14"/>
-    <p:sldId id="261" r:id="rId15"/>
-    <p:sldId id="262" r:id="rId16"/>
-    <p:sldId id="267" r:id="rId17"/>
-    <p:sldId id="270" r:id="rId18"/>
-    <p:sldId id="274" r:id="rId19"/>
-    <p:sldId id="275" r:id="rId20"/>
-    <p:sldId id="276" r:id="rId21"/>
-    <p:sldId id="277" r:id="rId22"/>
-    <p:sldId id="263" r:id="rId23"/>
+    <p:sldId id="278" r:id="rId7"/>
+    <p:sldId id="266" r:id="rId8"/>
+    <p:sldId id="260" r:id="rId9"/>
+    <p:sldId id="268" r:id="rId10"/>
+    <p:sldId id="269" r:id="rId11"/>
+    <p:sldId id="272" r:id="rId12"/>
+    <p:sldId id="271" r:id="rId13"/>
+    <p:sldId id="273" r:id="rId14"/>
+    <p:sldId id="264" r:id="rId15"/>
+    <p:sldId id="261" r:id="rId16"/>
+    <p:sldId id="262" r:id="rId17"/>
+    <p:sldId id="267" r:id="rId18"/>
+    <p:sldId id="270" r:id="rId19"/>
+    <p:sldId id="274" r:id="rId20"/>
+    <p:sldId id="275" r:id="rId21"/>
+    <p:sldId id="276" r:id="rId22"/>
+    <p:sldId id="277" r:id="rId23"/>
+    <p:sldId id="263" r:id="rId24"/>
   </p:sldIdLst>
   <p:sldSz cx="9144000" cy="6858000" type="screen4x3"/>
   <p:notesSz cx="6858000" cy="9144000"/>
@@ -229,7 +230,7 @@
           <a:p>
             <a:fld id="{53FDF33E-3C65-4C97-B984-5E296FC62525}" type="datetimeFigureOut">
               <a:rPr lang="de-DE" smtClean="0"/>
-              <a:t>20.03.2024</a:t>
+              <a:t>07.06.2025</a:t>
             </a:fld>
             <a:endParaRPr lang="de-DE"/>
           </a:p>
@@ -759,7 +760,7 @@
           <a:p>
             <a:fld id="{94818ED8-3753-490C-B819-473C9754FE47}" type="datetimeFigureOut">
               <a:rPr lang="de-DE" smtClean="0"/>
-              <a:t>20.03.2024</a:t>
+              <a:t>07.06.2025</a:t>
             </a:fld>
             <a:endParaRPr lang="de-DE"/>
           </a:p>
@@ -927,7 +928,7 @@
           <a:p>
             <a:fld id="{94818ED8-3753-490C-B819-473C9754FE47}" type="datetimeFigureOut">
               <a:rPr lang="de-DE" smtClean="0"/>
-              <a:t>20.03.2024</a:t>
+              <a:t>07.06.2025</a:t>
             </a:fld>
             <a:endParaRPr lang="de-DE"/>
           </a:p>
@@ -1105,7 +1106,7 @@
           <a:p>
             <a:fld id="{94818ED8-3753-490C-B819-473C9754FE47}" type="datetimeFigureOut">
               <a:rPr lang="de-DE" smtClean="0"/>
-              <a:t>20.03.2024</a:t>
+              <a:t>07.06.2025</a:t>
             </a:fld>
             <a:endParaRPr lang="de-DE"/>
           </a:p>
@@ -1288,7 +1289,7 @@
           <a:p>
             <a:fld id="{94818ED8-3753-490C-B819-473C9754FE47}" type="datetimeFigureOut">
               <a:rPr lang="de-DE" smtClean="0"/>
-              <a:t>20.03.2024</a:t>
+              <a:t>07.06.2025</a:t>
             </a:fld>
             <a:endParaRPr lang="de-DE"/>
           </a:p>
@@ -1574,7 +1575,7 @@
           <a:p>
             <a:fld id="{94818ED8-3753-490C-B819-473C9754FE47}" type="datetimeFigureOut">
               <a:rPr lang="de-DE" smtClean="0"/>
-              <a:t>20.03.2024</a:t>
+              <a:t>07.06.2025</a:t>
             </a:fld>
             <a:endParaRPr lang="de-DE"/>
           </a:p>
@@ -1859,7 +1860,7 @@
           <a:p>
             <a:fld id="{94818ED8-3753-490C-B819-473C9754FE47}" type="datetimeFigureOut">
               <a:rPr lang="de-DE" smtClean="0"/>
-              <a:t>20.03.2024</a:t>
+              <a:t>07.06.2025</a:t>
             </a:fld>
             <a:endParaRPr lang="de-DE"/>
           </a:p>
@@ -2278,7 +2279,7 @@
           <a:p>
             <a:fld id="{94818ED8-3753-490C-B819-473C9754FE47}" type="datetimeFigureOut">
               <a:rPr lang="de-DE" smtClean="0"/>
-              <a:t>20.03.2024</a:t>
+              <a:t>07.06.2025</a:t>
             </a:fld>
             <a:endParaRPr lang="de-DE"/>
           </a:p>
@@ -2395,7 +2396,7 @@
           <a:p>
             <a:fld id="{94818ED8-3753-490C-B819-473C9754FE47}" type="datetimeFigureOut">
               <a:rPr lang="de-DE" smtClean="0"/>
-              <a:t>20.03.2024</a:t>
+              <a:t>07.06.2025</a:t>
             </a:fld>
             <a:endParaRPr lang="de-DE"/>
           </a:p>
@@ -2490,7 +2491,7 @@
           <a:p>
             <a:fld id="{94818ED8-3753-490C-B819-473C9754FE47}" type="datetimeFigureOut">
               <a:rPr lang="de-DE" smtClean="0"/>
-              <a:t>20.03.2024</a:t>
+              <a:t>07.06.2025</a:t>
             </a:fld>
             <a:endParaRPr lang="de-DE"/>
           </a:p>
@@ -2765,7 +2766,7 @@
           <a:p>
             <a:fld id="{94818ED8-3753-490C-B819-473C9754FE47}" type="datetimeFigureOut">
               <a:rPr lang="de-DE" smtClean="0"/>
-              <a:t>20.03.2024</a:t>
+              <a:t>07.06.2025</a:t>
             </a:fld>
             <a:endParaRPr lang="de-DE"/>
           </a:p>
@@ -3017,7 +3018,7 @@
           <a:p>
             <a:fld id="{94818ED8-3753-490C-B819-473C9754FE47}" type="datetimeFigureOut">
               <a:rPr lang="de-DE" smtClean="0"/>
-              <a:t>20.03.2024</a:t>
+              <a:t>07.06.2025</a:t>
             </a:fld>
             <a:endParaRPr lang="de-DE"/>
           </a:p>
@@ -3228,7 +3229,7 @@
           <a:p>
             <a:fld id="{94818ED8-3753-490C-B819-473C9754FE47}" type="datetimeFigureOut">
               <a:rPr lang="de-DE" smtClean="0"/>
-              <a:t>20.03.2024</a:t>
+              <a:t>07.06.2025</a:t>
             </a:fld>
             <a:endParaRPr lang="de-DE"/>
           </a:p>
@@ -3763,25 +3764,40 @@
         </p:nvSpPr>
         <p:spPr>
           <a:xfrm>
-            <a:off x="457200" y="29478"/>
+            <a:off x="457200" y="274638"/>
             <a:ext cx="7139136" cy="1143000"/>
           </a:xfrm>
         </p:spPr>
         <p:txBody>
           <a:bodyPr>
-            <a:normAutofit/>
+            <a:normAutofit fontScale="90000"/>
           </a:bodyPr>
           <a:lstStyle/>
           <a:p>
             <a:r>
-              <a:rPr lang="de-DE" err="1"/>
+              <a:rPr lang="de-DE" dirty="0" err="1"/>
               <a:t>git</a:t>
             </a:r>
             <a:r>
-              <a:rPr lang="de-DE"/>
-              <a:t> checkout </a:t>
-            </a:r>
-            <a:endParaRPr lang="de-DE" dirty="0"/>
+              <a:rPr lang="de-DE" dirty="0"/>
+              <a:t> </a:t>
+            </a:r>
+            <a:r>
+              <a:rPr lang="de-DE" dirty="0" err="1"/>
+              <a:t>commit</a:t>
+            </a:r>
+            <a:r>
+              <a:rPr lang="de-DE" dirty="0"/>
+              <a:t> / </a:t>
+            </a:r>
+            <a:r>
+              <a:rPr lang="de-DE" dirty="0" err="1"/>
+              <a:t>Commits</a:t>
+            </a:r>
+            <a:r>
+              <a:rPr lang="de-DE" dirty="0"/>
+              <a:t> erstellen, ersetzen und entfernen</a:t>
+            </a:r>
           </a:p>
         </p:txBody>
       </p:sp>
@@ -3803,8 +3819,8 @@
         </p:nvSpPr>
         <p:spPr>
           <a:xfrm>
-            <a:off x="179512" y="1196752"/>
-            <a:ext cx="8964488" cy="5661248"/>
+            <a:off x="457200" y="1600200"/>
+            <a:ext cx="8229600" cy="5141168"/>
           </a:xfrm>
         </p:spPr>
         <p:txBody>
@@ -3814,6 +3830,599 @@
           <a:lstStyle/>
           <a:p>
             <a:r>
+              <a:rPr lang="de-DE" sz="2900" b="1" dirty="0" err="1">
+                <a:latin typeface="Courier New" panose="02070309020205020404" pitchFamily="49" charset="0"/>
+                <a:cs typeface="Courier New" panose="02070309020205020404" pitchFamily="49" charset="0"/>
+              </a:rPr>
+              <a:t>git</a:t>
+            </a:r>
+            <a:r>
+              <a:rPr lang="de-DE" sz="2900" b="1" dirty="0">
+                <a:latin typeface="Courier New" panose="02070309020205020404" pitchFamily="49" charset="0"/>
+                <a:cs typeface="Courier New" panose="02070309020205020404" pitchFamily="49" charset="0"/>
+              </a:rPr>
+              <a:t> </a:t>
+            </a:r>
+            <a:r>
+              <a:rPr lang="de-DE" sz="2900" b="1" dirty="0" err="1">
+                <a:latin typeface="Courier New" panose="02070309020205020404" pitchFamily="49" charset="0"/>
+                <a:cs typeface="Courier New" panose="02070309020205020404" pitchFamily="49" charset="0"/>
+              </a:rPr>
+              <a:t>commit</a:t>
+            </a:r>
+            <a:r>
+              <a:rPr lang="de-DE" sz="2900" b="1" dirty="0">
+                <a:latin typeface="Courier New" panose="02070309020205020404" pitchFamily="49" charset="0"/>
+                <a:cs typeface="Courier New" panose="02070309020205020404" pitchFamily="49" charset="0"/>
+              </a:rPr>
+              <a:t> </a:t>
+            </a:r>
+            <a:r>
+              <a:rPr lang="de-DE" dirty="0">
+                <a:sym typeface="Wingdings" panose="05000000000000000000" pitchFamily="2" charset="2"/>
+              </a:rPr>
+              <a:t> </a:t>
+            </a:r>
+            <a:r>
+              <a:rPr lang="de-DE" dirty="0"/>
+              <a:t>Erstellt einen neuen Snapshot (Commit) des Working-Dir im Repository, und zwar nur die Dateien, die vorher mit </a:t>
+            </a:r>
+            <a:r>
+              <a:rPr lang="de-DE" sz="2800" b="1" dirty="0" err="1">
+                <a:latin typeface="Courier New" panose="02070309020205020404" pitchFamily="49" charset="0"/>
+                <a:cs typeface="Courier New" panose="02070309020205020404" pitchFamily="49" charset="0"/>
+              </a:rPr>
+              <a:t>git</a:t>
+            </a:r>
+            <a:r>
+              <a:rPr lang="de-DE" sz="2800" b="1" dirty="0">
+                <a:latin typeface="Courier New" panose="02070309020205020404" pitchFamily="49" charset="0"/>
+                <a:cs typeface="Courier New" panose="02070309020205020404" pitchFamily="49" charset="0"/>
+              </a:rPr>
+              <a:t> </a:t>
+            </a:r>
+            <a:r>
+              <a:rPr lang="de-DE" sz="2800" b="1" dirty="0" err="1">
+                <a:latin typeface="Courier New" panose="02070309020205020404" pitchFamily="49" charset="0"/>
+                <a:cs typeface="Courier New" panose="02070309020205020404" pitchFamily="49" charset="0"/>
+              </a:rPr>
+              <a:t>add</a:t>
+            </a:r>
+            <a:r>
+              <a:rPr lang="de-DE" sz="2800" b="1" dirty="0">
+                <a:latin typeface="Courier New" panose="02070309020205020404" pitchFamily="49" charset="0"/>
+                <a:cs typeface="Courier New" panose="02070309020205020404" pitchFamily="49" charset="0"/>
+              </a:rPr>
+              <a:t> &lt;</a:t>
+            </a:r>
+            <a:r>
+              <a:rPr lang="de-DE" sz="2800" b="1" dirty="0" err="1">
+                <a:latin typeface="Courier New" panose="02070309020205020404" pitchFamily="49" charset="0"/>
+                <a:cs typeface="Courier New" panose="02070309020205020404" pitchFamily="49" charset="0"/>
+              </a:rPr>
+              <a:t>dateien</a:t>
+            </a:r>
+            <a:r>
+              <a:rPr lang="de-DE" sz="2800" b="1" dirty="0">
+                <a:latin typeface="Courier New" panose="02070309020205020404" pitchFamily="49" charset="0"/>
+                <a:cs typeface="Courier New" panose="02070309020205020404" pitchFamily="49" charset="0"/>
+              </a:rPr>
+              <a:t>&gt; </a:t>
+            </a:r>
+            <a:r>
+              <a:rPr lang="de-DE" dirty="0" err="1"/>
+              <a:t>gestaged</a:t>
+            </a:r>
+            <a:r>
+              <a:rPr lang="de-DE" dirty="0"/>
+              <a:t> worden sind. Dabei wird eine Textdatei geöffnet um einen aussagekräftigen Kommentar ("Message") zum Commit zu schreiben</a:t>
+            </a:r>
+          </a:p>
+          <a:p>
+            <a:r>
+              <a:rPr lang="de-DE" sz="2800" b="1" dirty="0" err="1">
+                <a:latin typeface="Courier New" panose="02070309020205020404" pitchFamily="49" charset="0"/>
+                <a:cs typeface="Courier New" panose="02070309020205020404" pitchFamily="49" charset="0"/>
+              </a:rPr>
+              <a:t>git</a:t>
+            </a:r>
+            <a:r>
+              <a:rPr lang="de-DE" sz="2800" b="1" dirty="0">
+                <a:latin typeface="Courier New" panose="02070309020205020404" pitchFamily="49" charset="0"/>
+                <a:cs typeface="Courier New" panose="02070309020205020404" pitchFamily="49" charset="0"/>
+              </a:rPr>
+              <a:t> </a:t>
+            </a:r>
+            <a:r>
+              <a:rPr lang="de-DE" sz="2800" b="1" dirty="0" err="1">
+                <a:latin typeface="Courier New" panose="02070309020205020404" pitchFamily="49" charset="0"/>
+                <a:cs typeface="Courier New" panose="02070309020205020404" pitchFamily="49" charset="0"/>
+              </a:rPr>
+              <a:t>commit</a:t>
+            </a:r>
+            <a:r>
+              <a:rPr lang="de-DE" sz="2800" b="1" dirty="0">
+                <a:latin typeface="Courier New" panose="02070309020205020404" pitchFamily="49" charset="0"/>
+                <a:cs typeface="Courier New" panose="02070309020205020404" pitchFamily="49" charset="0"/>
+              </a:rPr>
+              <a:t> -m "Kommentar" </a:t>
+            </a:r>
+            <a:r>
+              <a:rPr lang="de-DE" dirty="0">
+                <a:sym typeface="Wingdings" panose="05000000000000000000" pitchFamily="2" charset="2"/>
+              </a:rPr>
+              <a:t> mit Kommentar committen, dabei fällt das Öffnen der Textdatei weg</a:t>
+            </a:r>
+          </a:p>
+          <a:p>
+            <a:r>
+              <a:rPr lang="de-DE" sz="2800" b="1" dirty="0" err="1">
+                <a:latin typeface="Courier New" panose="02070309020205020404" pitchFamily="49" charset="0"/>
+                <a:cs typeface="Courier New" panose="02070309020205020404" pitchFamily="49" charset="0"/>
+              </a:rPr>
+              <a:t>git</a:t>
+            </a:r>
+            <a:r>
+              <a:rPr lang="de-DE" sz="2800" b="1" dirty="0">
+                <a:latin typeface="Courier New" panose="02070309020205020404" pitchFamily="49" charset="0"/>
+                <a:cs typeface="Courier New" panose="02070309020205020404" pitchFamily="49" charset="0"/>
+              </a:rPr>
+              <a:t> </a:t>
+            </a:r>
+            <a:r>
+              <a:rPr lang="de-DE" sz="2800" b="1" dirty="0" err="1">
+                <a:latin typeface="Courier New" panose="02070309020205020404" pitchFamily="49" charset="0"/>
+                <a:cs typeface="Courier New" panose="02070309020205020404" pitchFamily="49" charset="0"/>
+              </a:rPr>
+              <a:t>commit</a:t>
+            </a:r>
+            <a:r>
+              <a:rPr lang="de-DE" sz="2800" b="1" dirty="0">
+                <a:latin typeface="Courier New" panose="02070309020205020404" pitchFamily="49" charset="0"/>
+                <a:cs typeface="Courier New" panose="02070309020205020404" pitchFamily="49" charset="0"/>
+              </a:rPr>
+              <a:t> -a -m "Kommentar" </a:t>
+            </a:r>
+            <a:r>
+              <a:rPr lang="de-DE" dirty="0">
+                <a:sym typeface="Wingdings" panose="05000000000000000000" pitchFamily="2" charset="2"/>
+              </a:rPr>
+              <a:t> </a:t>
+            </a:r>
+            <a:r>
+              <a:rPr lang="de-DE" dirty="0" err="1">
+                <a:sym typeface="Wingdings" panose="05000000000000000000" pitchFamily="2" charset="2"/>
+              </a:rPr>
+              <a:t>Committed</a:t>
+            </a:r>
+            <a:r>
+              <a:rPr lang="de-DE" dirty="0">
+                <a:sym typeface="Wingdings" panose="05000000000000000000" pitchFamily="2" charset="2"/>
+              </a:rPr>
+              <a:t> alle Dateien, die seit dem letzten Commit verändert wurden (quasi ein "auto-stage")</a:t>
+            </a:r>
+          </a:p>
+          <a:p>
+            <a:r>
+              <a:rPr lang="de-DE" sz="2800" b="1" dirty="0" err="1">
+                <a:latin typeface="Courier New" panose="02070309020205020404" pitchFamily="49" charset="0"/>
+                <a:cs typeface="Courier New" panose="02070309020205020404" pitchFamily="49" charset="0"/>
+                <a:sym typeface="Wingdings" panose="05000000000000000000" pitchFamily="2" charset="2"/>
+              </a:rPr>
+              <a:t>git</a:t>
+            </a:r>
+            <a:r>
+              <a:rPr lang="de-DE" sz="2800" b="1" dirty="0">
+                <a:latin typeface="Courier New" panose="02070309020205020404" pitchFamily="49" charset="0"/>
+                <a:cs typeface="Courier New" panose="02070309020205020404" pitchFamily="49" charset="0"/>
+                <a:sym typeface="Wingdings" panose="05000000000000000000" pitchFamily="2" charset="2"/>
+              </a:rPr>
+              <a:t> </a:t>
+            </a:r>
+            <a:r>
+              <a:rPr lang="de-DE" sz="2800" b="1" dirty="0" err="1">
+                <a:latin typeface="Courier New" panose="02070309020205020404" pitchFamily="49" charset="0"/>
+                <a:cs typeface="Courier New" panose="02070309020205020404" pitchFamily="49" charset="0"/>
+                <a:sym typeface="Wingdings" panose="05000000000000000000" pitchFamily="2" charset="2"/>
+              </a:rPr>
+              <a:t>commit</a:t>
+            </a:r>
+            <a:r>
+              <a:rPr lang="de-DE" sz="2800" b="1" dirty="0">
+                <a:latin typeface="Courier New" panose="02070309020205020404" pitchFamily="49" charset="0"/>
+                <a:cs typeface="Courier New" panose="02070309020205020404" pitchFamily="49" charset="0"/>
+                <a:sym typeface="Wingdings" panose="05000000000000000000" pitchFamily="2" charset="2"/>
+              </a:rPr>
+              <a:t> --</a:t>
+            </a:r>
+            <a:r>
+              <a:rPr lang="de-DE" sz="2800" b="1" dirty="0" err="1">
+                <a:latin typeface="Courier New" panose="02070309020205020404" pitchFamily="49" charset="0"/>
+                <a:cs typeface="Courier New" panose="02070309020205020404" pitchFamily="49" charset="0"/>
+                <a:sym typeface="Wingdings" panose="05000000000000000000" pitchFamily="2" charset="2"/>
+              </a:rPr>
+              <a:t>amend</a:t>
+            </a:r>
+            <a:r>
+              <a:rPr lang="de-DE" sz="2800" b="1" dirty="0">
+                <a:latin typeface="Courier New" panose="02070309020205020404" pitchFamily="49" charset="0"/>
+                <a:cs typeface="Courier New" panose="02070309020205020404" pitchFamily="49" charset="0"/>
+                <a:sym typeface="Wingdings" panose="05000000000000000000" pitchFamily="2" charset="2"/>
+              </a:rPr>
+              <a:t> -m "Kommentar" </a:t>
+            </a:r>
+            <a:r>
+              <a:rPr lang="de-DE" dirty="0">
+                <a:sym typeface="Wingdings" panose="05000000000000000000" pitchFamily="2" charset="2"/>
+              </a:rPr>
+              <a:t> Ersetzt den letzten Commit ("HEAD") mit einem neuen Commit</a:t>
+            </a:r>
+          </a:p>
+          <a:p>
+            <a:r>
+              <a:rPr lang="de-DE" sz="2900" b="1" dirty="0" err="1">
+                <a:latin typeface="Courier New" panose="02070309020205020404" pitchFamily="49" charset="0"/>
+                <a:cs typeface="Courier New" panose="02070309020205020404" pitchFamily="49" charset="0"/>
+                <a:sym typeface="Wingdings" panose="05000000000000000000" pitchFamily="2" charset="2"/>
+              </a:rPr>
+              <a:t>git</a:t>
+            </a:r>
+            <a:r>
+              <a:rPr lang="de-DE" sz="2900" b="1" dirty="0">
+                <a:latin typeface="Courier New" panose="02070309020205020404" pitchFamily="49" charset="0"/>
+                <a:cs typeface="Courier New" panose="02070309020205020404" pitchFamily="49" charset="0"/>
+                <a:sym typeface="Wingdings" panose="05000000000000000000" pitchFamily="2" charset="2"/>
+              </a:rPr>
+              <a:t> </a:t>
+            </a:r>
+            <a:r>
+              <a:rPr lang="de-DE" sz="2900" b="1" dirty="0" err="1">
+                <a:latin typeface="Courier New" panose="02070309020205020404" pitchFamily="49" charset="0"/>
+                <a:cs typeface="Courier New" panose="02070309020205020404" pitchFamily="49" charset="0"/>
+                <a:sym typeface="Wingdings" panose="05000000000000000000" pitchFamily="2" charset="2"/>
+              </a:rPr>
+              <a:t>reset</a:t>
+            </a:r>
+            <a:r>
+              <a:rPr lang="de-DE" sz="2900" b="1" dirty="0">
+                <a:latin typeface="Courier New" panose="02070309020205020404" pitchFamily="49" charset="0"/>
+                <a:cs typeface="Courier New" panose="02070309020205020404" pitchFamily="49" charset="0"/>
+                <a:sym typeface="Wingdings" panose="05000000000000000000" pitchFamily="2" charset="2"/>
+              </a:rPr>
+              <a:t> --soft HEAD~1 </a:t>
+            </a:r>
+            <a:r>
+              <a:rPr lang="de-DE" dirty="0">
+                <a:sym typeface="Wingdings" panose="05000000000000000000" pitchFamily="2" charset="2"/>
+              </a:rPr>
+              <a:t> Entfernt den aktuellsten Commit (Die Zahl </a:t>
+            </a:r>
+            <a:r>
+              <a:rPr lang="de-DE" sz="3200" b="1" dirty="0">
+                <a:latin typeface="Courier New" panose="02070309020205020404" pitchFamily="49" charset="0"/>
+                <a:cs typeface="Courier New" panose="02070309020205020404" pitchFamily="49" charset="0"/>
+                <a:sym typeface="Wingdings" panose="05000000000000000000" pitchFamily="2" charset="2"/>
+              </a:rPr>
+              <a:t>~1 </a:t>
+            </a:r>
+            <a:r>
+              <a:rPr lang="de-DE" dirty="0">
+                <a:sym typeface="Wingdings" panose="05000000000000000000" pitchFamily="2" charset="2"/>
+              </a:rPr>
+              <a:t>steht für Anzahl der </a:t>
+            </a:r>
+            <a:r>
+              <a:rPr lang="de-DE" dirty="0" err="1">
+                <a:sym typeface="Wingdings" panose="05000000000000000000" pitchFamily="2" charset="2"/>
+              </a:rPr>
+              <a:t>Commits</a:t>
+            </a:r>
+            <a:r>
+              <a:rPr lang="de-DE" dirty="0">
+                <a:sym typeface="Wingdings" panose="05000000000000000000" pitchFamily="2" charset="2"/>
+              </a:rPr>
+              <a:t>, die entfernt werden), das Working-Dir bleibt dabei unverändert.</a:t>
+            </a:r>
+          </a:p>
+          <a:p>
+            <a:r>
+              <a:rPr lang="de-DE" sz="2900" b="1" dirty="0" err="1">
+                <a:latin typeface="Courier New" panose="02070309020205020404" pitchFamily="49" charset="0"/>
+                <a:cs typeface="Courier New" panose="02070309020205020404" pitchFamily="49" charset="0"/>
+              </a:rPr>
+              <a:t>git</a:t>
+            </a:r>
+            <a:r>
+              <a:rPr lang="de-DE" sz="2900" b="1" dirty="0">
+                <a:latin typeface="Courier New" panose="02070309020205020404" pitchFamily="49" charset="0"/>
+                <a:cs typeface="Courier New" panose="02070309020205020404" pitchFamily="49" charset="0"/>
+              </a:rPr>
+              <a:t> </a:t>
+            </a:r>
+            <a:r>
+              <a:rPr lang="de-DE" sz="2900" b="1" dirty="0" err="1">
+                <a:latin typeface="Courier New" panose="02070309020205020404" pitchFamily="49" charset="0"/>
+                <a:cs typeface="Courier New" panose="02070309020205020404" pitchFamily="49" charset="0"/>
+              </a:rPr>
+              <a:t>reset</a:t>
+            </a:r>
+            <a:r>
+              <a:rPr lang="de-DE" sz="2900" b="1" dirty="0">
+                <a:latin typeface="Courier New" panose="02070309020205020404" pitchFamily="49" charset="0"/>
+                <a:cs typeface="Courier New" panose="02070309020205020404" pitchFamily="49" charset="0"/>
+              </a:rPr>
+              <a:t> --</a:t>
+            </a:r>
+            <a:r>
+              <a:rPr lang="de-DE" sz="2900" b="1" dirty="0" err="1">
+                <a:latin typeface="Courier New" panose="02070309020205020404" pitchFamily="49" charset="0"/>
+                <a:cs typeface="Courier New" panose="02070309020205020404" pitchFamily="49" charset="0"/>
+              </a:rPr>
+              <a:t>hard</a:t>
+            </a:r>
+            <a:r>
+              <a:rPr lang="de-DE" sz="2900" b="1" dirty="0">
+                <a:latin typeface="Courier New" panose="02070309020205020404" pitchFamily="49" charset="0"/>
+                <a:cs typeface="Courier New" panose="02070309020205020404" pitchFamily="49" charset="0"/>
+              </a:rPr>
+              <a:t> HEAD~1 </a:t>
+            </a:r>
+            <a:r>
+              <a:rPr lang="de-DE" dirty="0">
+                <a:sym typeface="Wingdings" panose="05000000000000000000" pitchFamily="2" charset="2"/>
+              </a:rPr>
+              <a:t> Entfernt den aktuellsten Commit, und setzt auch das Working-Dir auf den Inhalt des vorigen Commit zurück.</a:t>
+            </a:r>
+            <a:br>
+              <a:rPr lang="de-DE" dirty="0">
+                <a:sym typeface="Wingdings" panose="05000000000000000000" pitchFamily="2" charset="2"/>
+              </a:rPr>
+            </a:br>
+            <a:r>
+              <a:rPr lang="de-DE" dirty="0">
+                <a:sym typeface="Wingdings" panose="05000000000000000000" pitchFamily="2" charset="2"/>
+              </a:rPr>
+              <a:t>(Die Zahl </a:t>
+            </a:r>
+            <a:r>
+              <a:rPr lang="de-DE" sz="3200" b="1" dirty="0">
+                <a:latin typeface="Courier New" panose="02070309020205020404" pitchFamily="49" charset="0"/>
+                <a:cs typeface="Courier New" panose="02070309020205020404" pitchFamily="49" charset="0"/>
+                <a:sym typeface="Wingdings" panose="05000000000000000000" pitchFamily="2" charset="2"/>
+              </a:rPr>
+              <a:t>~1 </a:t>
+            </a:r>
+            <a:r>
+              <a:rPr lang="de-DE" dirty="0">
+                <a:sym typeface="Wingdings" panose="05000000000000000000" pitchFamily="2" charset="2"/>
+              </a:rPr>
+              <a:t>steht für Anzahl der </a:t>
+            </a:r>
+            <a:r>
+              <a:rPr lang="de-DE" dirty="0" err="1">
+                <a:sym typeface="Wingdings" panose="05000000000000000000" pitchFamily="2" charset="2"/>
+              </a:rPr>
+              <a:t>Commits</a:t>
+            </a:r>
+            <a:r>
+              <a:rPr lang="de-DE" dirty="0">
+                <a:sym typeface="Wingdings" panose="05000000000000000000" pitchFamily="2" charset="2"/>
+              </a:rPr>
+              <a:t>, die entfernt werden)</a:t>
+            </a:r>
+          </a:p>
+          <a:p>
+            <a:r>
+              <a:rPr lang="de-DE" sz="2900" b="1" dirty="0" err="1">
+                <a:latin typeface="Courier New" panose="02070309020205020404" pitchFamily="49" charset="0"/>
+                <a:cs typeface="Courier New" panose="02070309020205020404" pitchFamily="49" charset="0"/>
+                <a:sym typeface="Wingdings" panose="05000000000000000000" pitchFamily="2" charset="2"/>
+              </a:rPr>
+              <a:t>git</a:t>
+            </a:r>
+            <a:r>
+              <a:rPr lang="de-DE" sz="2900" b="1" dirty="0">
+                <a:latin typeface="Courier New" panose="02070309020205020404" pitchFamily="49" charset="0"/>
+                <a:cs typeface="Courier New" panose="02070309020205020404" pitchFamily="49" charset="0"/>
+                <a:sym typeface="Wingdings" panose="05000000000000000000" pitchFamily="2" charset="2"/>
+              </a:rPr>
+              <a:t> </a:t>
+            </a:r>
+            <a:r>
+              <a:rPr lang="de-DE" sz="2900" b="1" dirty="0" err="1">
+                <a:latin typeface="Courier New" panose="02070309020205020404" pitchFamily="49" charset="0"/>
+                <a:cs typeface="Courier New" panose="02070309020205020404" pitchFamily="49" charset="0"/>
+                <a:sym typeface="Wingdings" panose="05000000000000000000" pitchFamily="2" charset="2"/>
+              </a:rPr>
+              <a:t>checkout</a:t>
+            </a:r>
+            <a:r>
+              <a:rPr lang="de-DE" sz="2900" b="1" dirty="0">
+                <a:latin typeface="Courier New" panose="02070309020205020404" pitchFamily="49" charset="0"/>
+                <a:cs typeface="Courier New" panose="02070309020205020404" pitchFamily="49" charset="0"/>
+                <a:sym typeface="Wingdings" panose="05000000000000000000" pitchFamily="2" charset="2"/>
+              </a:rPr>
+              <a:t> &lt;</a:t>
+            </a:r>
+            <a:r>
+              <a:rPr lang="de-DE" sz="2900" b="1" dirty="0" err="1">
+                <a:latin typeface="Courier New" panose="02070309020205020404" pitchFamily="49" charset="0"/>
+                <a:cs typeface="Courier New" panose="02070309020205020404" pitchFamily="49" charset="0"/>
+                <a:sym typeface="Wingdings" panose="05000000000000000000" pitchFamily="2" charset="2"/>
+              </a:rPr>
+              <a:t>commit</a:t>
+            </a:r>
+            <a:r>
+              <a:rPr lang="de-DE" sz="2900" b="1" dirty="0">
+                <a:latin typeface="Courier New" panose="02070309020205020404" pitchFamily="49" charset="0"/>
+                <a:cs typeface="Courier New" panose="02070309020205020404" pitchFamily="49" charset="0"/>
+                <a:sym typeface="Wingdings" panose="05000000000000000000" pitchFamily="2" charset="2"/>
+              </a:rPr>
+              <a:t>&gt; &lt;</a:t>
+            </a:r>
+            <a:r>
+              <a:rPr lang="de-DE" sz="2900" b="1" dirty="0" err="1">
+                <a:latin typeface="Courier New" panose="02070309020205020404" pitchFamily="49" charset="0"/>
+                <a:cs typeface="Courier New" panose="02070309020205020404" pitchFamily="49" charset="0"/>
+                <a:sym typeface="Wingdings" panose="05000000000000000000" pitchFamily="2" charset="2"/>
+              </a:rPr>
+              <a:t>dateiname</a:t>
+            </a:r>
+            <a:r>
+              <a:rPr lang="de-DE" sz="2900" b="1" dirty="0">
+                <a:latin typeface="Courier New" panose="02070309020205020404" pitchFamily="49" charset="0"/>
+                <a:cs typeface="Courier New" panose="02070309020205020404" pitchFamily="49" charset="0"/>
+                <a:sym typeface="Wingdings" panose="05000000000000000000" pitchFamily="2" charset="2"/>
+              </a:rPr>
+              <a:t>&gt; </a:t>
+            </a:r>
+            <a:r>
+              <a:rPr lang="de-DE" dirty="0">
+                <a:sym typeface="Wingdings" panose="05000000000000000000" pitchFamily="2" charset="2"/>
+              </a:rPr>
+              <a:t> Wiederherstellung eines bestimmten Commit ins Working-Dir, z.B. </a:t>
+            </a:r>
+            <a:r>
+              <a:rPr lang="de-DE" sz="2900" b="1" dirty="0" err="1">
+                <a:latin typeface="Courier New" panose="02070309020205020404" pitchFamily="49" charset="0"/>
+                <a:cs typeface="Courier New" panose="02070309020205020404" pitchFamily="49" charset="0"/>
+                <a:sym typeface="Wingdings" panose="05000000000000000000" pitchFamily="2" charset="2"/>
+              </a:rPr>
+              <a:t>git</a:t>
+            </a:r>
+            <a:r>
+              <a:rPr lang="de-DE" sz="2900" b="1" dirty="0">
+                <a:latin typeface="Courier New" panose="02070309020205020404" pitchFamily="49" charset="0"/>
+                <a:cs typeface="Courier New" panose="02070309020205020404" pitchFamily="49" charset="0"/>
+                <a:sym typeface="Wingdings" panose="05000000000000000000" pitchFamily="2" charset="2"/>
+              </a:rPr>
+              <a:t> </a:t>
+            </a:r>
+            <a:r>
+              <a:rPr lang="de-DE" sz="2900" b="1" dirty="0" err="1">
+                <a:latin typeface="Courier New" panose="02070309020205020404" pitchFamily="49" charset="0"/>
+                <a:cs typeface="Courier New" panose="02070309020205020404" pitchFamily="49" charset="0"/>
+                <a:sym typeface="Wingdings" panose="05000000000000000000" pitchFamily="2" charset="2"/>
+              </a:rPr>
+              <a:t>checkout</a:t>
+            </a:r>
+            <a:r>
+              <a:rPr lang="de-DE" sz="2900" b="1" dirty="0">
+                <a:latin typeface="Courier New" panose="02070309020205020404" pitchFamily="49" charset="0"/>
+                <a:cs typeface="Courier New" panose="02070309020205020404" pitchFamily="49" charset="0"/>
+                <a:sym typeface="Wingdings" panose="05000000000000000000" pitchFamily="2" charset="2"/>
+              </a:rPr>
+              <a:t> HEAD~1 *.*</a:t>
+            </a:r>
+            <a:r>
+              <a:rPr lang="de-DE" sz="3300" dirty="0">
+                <a:sym typeface="Wingdings" panose="05000000000000000000" pitchFamily="2" charset="2"/>
+              </a:rPr>
+              <a:t>, siehe folgende Folie!</a:t>
+            </a:r>
+            <a:endParaRPr lang="de-DE" sz="3300" dirty="0"/>
+          </a:p>
+        </p:txBody>
+      </p:sp>
+    </p:spTree>
+    <p:extLst>
+      <p:ext uri="{BB962C8B-B14F-4D97-AF65-F5344CB8AC3E}">
+        <p14:creationId xmlns:p14="http://schemas.microsoft.com/office/powerpoint/2010/main" val="1723275432"/>
+      </p:ext>
+    </p:extLst>
+  </p:cSld>
+  <p:clrMapOvr>
+    <a:masterClrMapping/>
+  </p:clrMapOvr>
+</p:sld>
+</file>
+
+<file path=ppt/slides/slide11.xml><?xml version="1.0" encoding="utf-8"?>
+<p:sld xmlns:a="http://schemas.openxmlformats.org/drawingml/2006/main" xmlns:r="http://schemas.openxmlformats.org/officeDocument/2006/relationships" xmlns:p="http://schemas.openxmlformats.org/presentationml/2006/main">
+  <p:cSld>
+    <p:spTree>
+      <p:nvGrpSpPr>
+        <p:cNvPr id="1" name=""/>
+        <p:cNvGrpSpPr/>
+        <p:nvPr/>
+      </p:nvGrpSpPr>
+      <p:grpSpPr>
+        <a:xfrm>
+          <a:off x="0" y="0"/>
+          <a:ext cx="0" cy="0"/>
+          <a:chOff x="0" y="0"/>
+          <a:chExt cx="0" cy="0"/>
+        </a:xfrm>
+      </p:grpSpPr>
+      <p:sp>
+        <p:nvSpPr>
+          <p:cNvPr id="2" name="Titel 1">
+            <a:extLst>
+              <a:ext uri="{FF2B5EF4-FFF2-40B4-BE49-F238E27FC236}">
+                <a16:creationId xmlns:a16="http://schemas.microsoft.com/office/drawing/2014/main" id="{37E45B4D-8157-57D5-C5D0-F9012EADC956}"/>
+              </a:ext>
+            </a:extLst>
+          </p:cNvPr>
+          <p:cNvSpPr>
+            <a:spLocks noGrp="1"/>
+          </p:cNvSpPr>
+          <p:nvPr>
+            <p:ph type="title"/>
+          </p:nvPr>
+        </p:nvSpPr>
+        <p:spPr>
+          <a:xfrm>
+            <a:off x="457200" y="29478"/>
+            <a:ext cx="7139136" cy="1143000"/>
+          </a:xfrm>
+        </p:spPr>
+        <p:txBody>
+          <a:bodyPr>
+            <a:normAutofit/>
+          </a:bodyPr>
+          <a:lstStyle/>
+          <a:p>
+            <a:r>
+              <a:rPr lang="de-DE" err="1"/>
+              <a:t>git</a:t>
+            </a:r>
+            <a:r>
+              <a:rPr lang="de-DE"/>
+              <a:t> checkout </a:t>
+            </a:r>
+            <a:endParaRPr lang="de-DE" dirty="0"/>
+          </a:p>
+        </p:txBody>
+      </p:sp>
+      <p:sp>
+        <p:nvSpPr>
+          <p:cNvPr id="3" name="Inhaltsplatzhalter 2">
+            <a:extLst>
+              <a:ext uri="{FF2B5EF4-FFF2-40B4-BE49-F238E27FC236}">
+                <a16:creationId xmlns:a16="http://schemas.microsoft.com/office/drawing/2014/main" id="{DCA3FA79-44FA-F478-643B-9165D103535C}"/>
+              </a:ext>
+            </a:extLst>
+          </p:cNvPr>
+          <p:cNvSpPr>
+            <a:spLocks noGrp="1"/>
+          </p:cNvSpPr>
+          <p:nvPr>
+            <p:ph idx="1"/>
+          </p:nvPr>
+        </p:nvSpPr>
+        <p:spPr>
+          <a:xfrm>
+            <a:off x="0" y="1196752"/>
+            <a:ext cx="9144000" cy="5661248"/>
+          </a:xfrm>
+        </p:spPr>
+        <p:txBody>
+          <a:bodyPr>
+            <a:normAutofit fontScale="55000" lnSpcReduction="20000"/>
+          </a:bodyPr>
+          <a:lstStyle/>
+          <a:p>
+            <a:r>
               <a:rPr lang="de-DE" sz="2800" b="1" dirty="0" err="1">
                 <a:latin typeface="Courier New" panose="02070309020205020404" pitchFamily="49" charset="0"/>
                 <a:cs typeface="Courier New" panose="02070309020205020404" pitchFamily="49" charset="0"/>
@@ -4061,6 +4670,94 @@
               <a:t> und Wiederherstellung des HEAD mit </a:t>
             </a:r>
             <a:r>
+              <a:rPr lang="de-DE" sz="3300" b="1" dirty="0" err="1">
+                <a:latin typeface="Courier New" panose="02070309020205020404" pitchFamily="49" charset="0"/>
+                <a:cs typeface="Courier New" panose="02070309020205020404" pitchFamily="49" charset="0"/>
+                <a:sym typeface="Wingdings" panose="05000000000000000000" pitchFamily="2" charset="2"/>
+              </a:rPr>
+              <a:t>git</a:t>
+            </a:r>
+            <a:r>
+              <a:rPr lang="de-DE" sz="3300" b="1" dirty="0">
+                <a:latin typeface="Courier New" panose="02070309020205020404" pitchFamily="49" charset="0"/>
+                <a:cs typeface="Courier New" panose="02070309020205020404" pitchFamily="49" charset="0"/>
+                <a:sym typeface="Wingdings" panose="05000000000000000000" pitchFamily="2" charset="2"/>
+              </a:rPr>
+              <a:t> switch </a:t>
+            </a:r>
+            <a:r>
+              <a:rPr lang="de-DE" sz="3300" b="1" dirty="0" err="1">
+                <a:latin typeface="Courier New" panose="02070309020205020404" pitchFamily="49" charset="0"/>
+                <a:cs typeface="Courier New" panose="02070309020205020404" pitchFamily="49" charset="0"/>
+                <a:sym typeface="Wingdings" panose="05000000000000000000" pitchFamily="2" charset="2"/>
+              </a:rPr>
+              <a:t>main</a:t>
+            </a:r>
+            <a:r>
+              <a:rPr lang="de-DE" sz="3300" b="1" dirty="0">
+                <a:latin typeface="Courier New" panose="02070309020205020404" pitchFamily="49" charset="0"/>
+                <a:cs typeface="Courier New" panose="02070309020205020404" pitchFamily="49" charset="0"/>
+                <a:sym typeface="Wingdings" panose="05000000000000000000" pitchFamily="2" charset="2"/>
+              </a:rPr>
+              <a:t> </a:t>
+            </a:r>
+            <a:r>
+              <a:rPr lang="de-DE" dirty="0">
+                <a:sym typeface="Wingdings" panose="05000000000000000000" pitchFamily="2" charset="2"/>
+              </a:rPr>
+              <a:t>)</a:t>
+            </a:r>
+          </a:p>
+          <a:p>
+            <a:r>
+              <a:rPr lang="de-DE" sz="2800" b="1" dirty="0" err="1">
+                <a:latin typeface="Courier New" panose="02070309020205020404" pitchFamily="49" charset="0"/>
+                <a:cs typeface="Courier New" panose="02070309020205020404" pitchFamily="49" charset="0"/>
+              </a:rPr>
+              <a:t>git</a:t>
+            </a:r>
+            <a:r>
+              <a:rPr lang="de-DE" sz="2800" b="1" dirty="0">
+                <a:latin typeface="Courier New" panose="02070309020205020404" pitchFamily="49" charset="0"/>
+                <a:cs typeface="Courier New" panose="02070309020205020404" pitchFamily="49" charset="0"/>
+              </a:rPr>
+              <a:t> </a:t>
+            </a:r>
+            <a:r>
+              <a:rPr lang="de-DE" sz="2800" b="1" dirty="0" err="1">
+                <a:latin typeface="Courier New" panose="02070309020205020404" pitchFamily="49" charset="0"/>
+                <a:cs typeface="Courier New" panose="02070309020205020404" pitchFamily="49" charset="0"/>
+              </a:rPr>
+              <a:t>checkout</a:t>
+            </a:r>
+            <a:r>
+              <a:rPr lang="de-DE" sz="2800" b="1" dirty="0">
+                <a:latin typeface="Courier New" panose="02070309020205020404" pitchFamily="49" charset="0"/>
+                <a:cs typeface="Courier New" panose="02070309020205020404" pitchFamily="49" charset="0"/>
+              </a:rPr>
+              <a:t> –b &lt;</a:t>
+            </a:r>
+            <a:r>
+              <a:rPr lang="de-DE" sz="2800" b="1" dirty="0" err="1">
+                <a:latin typeface="Courier New" panose="02070309020205020404" pitchFamily="49" charset="0"/>
+                <a:cs typeface="Courier New" panose="02070309020205020404" pitchFamily="49" charset="0"/>
+              </a:rPr>
+              <a:t>branchname</a:t>
+            </a:r>
+            <a:r>
+              <a:rPr lang="de-DE" sz="2800" b="1" dirty="0">
+                <a:latin typeface="Courier New" panose="02070309020205020404" pitchFamily="49" charset="0"/>
+                <a:cs typeface="Courier New" panose="02070309020205020404" pitchFamily="49" charset="0"/>
+              </a:rPr>
+              <a:t>&gt; </a:t>
+            </a:r>
+            <a:r>
+              <a:rPr lang="de-DE" dirty="0">
+                <a:sym typeface="Wingdings" panose="05000000000000000000" pitchFamily="2" charset="2"/>
+              </a:rPr>
+              <a:t> Erstellt einen neuen Zweig vom aktuellen Working-Dir und wechselt dort rein (oder </a:t>
+            </a:r>
+            <a:r>
               <a:rPr lang="de-DE" sz="2900" b="1" dirty="0" err="1">
                 <a:latin typeface="Courier New" panose="02070309020205020404" pitchFamily="49" charset="0"/>
                 <a:cs typeface="Courier New" panose="02070309020205020404" pitchFamily="49" charset="0"/>
@@ -4074,106 +4771,34 @@
                 <a:cs typeface="Courier New" panose="02070309020205020404" pitchFamily="49" charset="0"/>
                 <a:sym typeface="Wingdings" panose="05000000000000000000" pitchFamily="2" charset="2"/>
               </a:rPr>
-              <a:t> switch - </a:t>
-            </a:r>
-            <a:r>
-              <a:rPr lang="de-DE" dirty="0">
-                <a:sym typeface="Wingdings" panose="05000000000000000000" pitchFamily="2" charset="2"/>
-              </a:rPr>
-              <a:t>)</a:t>
-            </a:r>
-          </a:p>
-          <a:p>
-            <a:r>
-              <a:rPr lang="de-DE" sz="2800" b="1" dirty="0" err="1">
-                <a:latin typeface="Courier New" panose="02070309020205020404" pitchFamily="49" charset="0"/>
-                <a:cs typeface="Courier New" panose="02070309020205020404" pitchFamily="49" charset="0"/>
-              </a:rPr>
-              <a:t>git</a:t>
-            </a:r>
-            <a:r>
-              <a:rPr lang="de-DE" sz="2800" b="1" dirty="0">
-                <a:latin typeface="Courier New" panose="02070309020205020404" pitchFamily="49" charset="0"/>
-                <a:cs typeface="Courier New" panose="02070309020205020404" pitchFamily="49" charset="0"/>
-              </a:rPr>
               <a:t> </a:t>
             </a:r>
             <a:r>
-              <a:rPr lang="de-DE" sz="2800" b="1" dirty="0" err="1">
-                <a:latin typeface="Courier New" panose="02070309020205020404" pitchFamily="49" charset="0"/>
-                <a:cs typeface="Courier New" panose="02070309020205020404" pitchFamily="49" charset="0"/>
-              </a:rPr>
-              <a:t>checkout</a:t>
-            </a:r>
-            <a:r>
-              <a:rPr lang="de-DE" sz="2800" b="1" dirty="0">
-                <a:latin typeface="Courier New" panose="02070309020205020404" pitchFamily="49" charset="0"/>
-                <a:cs typeface="Courier New" panose="02070309020205020404" pitchFamily="49" charset="0"/>
-              </a:rPr>
-              <a:t> –b &lt;</a:t>
-            </a:r>
-            <a:r>
-              <a:rPr lang="de-DE" sz="2800" b="1" dirty="0" err="1">
-                <a:latin typeface="Courier New" panose="02070309020205020404" pitchFamily="49" charset="0"/>
-                <a:cs typeface="Courier New" panose="02070309020205020404" pitchFamily="49" charset="0"/>
+              <a:rPr lang="de-DE" sz="2900" b="1" dirty="0" err="1">
+                <a:latin typeface="Courier New" panose="02070309020205020404" pitchFamily="49" charset="0"/>
+                <a:cs typeface="Courier New" panose="02070309020205020404" pitchFamily="49" charset="0"/>
+                <a:sym typeface="Wingdings" panose="05000000000000000000" pitchFamily="2" charset="2"/>
+              </a:rPr>
+              <a:t>branch</a:t>
+            </a:r>
+            <a:r>
+              <a:rPr lang="de-DE" sz="2900" b="1" dirty="0">
+                <a:latin typeface="Courier New" panose="02070309020205020404" pitchFamily="49" charset="0"/>
+                <a:cs typeface="Courier New" panose="02070309020205020404" pitchFamily="49" charset="0"/>
+                <a:sym typeface="Wingdings" panose="05000000000000000000" pitchFamily="2" charset="2"/>
+              </a:rPr>
+              <a:t> &lt;</a:t>
+            </a:r>
+            <a:r>
+              <a:rPr lang="de-DE" sz="2900" b="1" dirty="0" err="1">
+                <a:latin typeface="Courier New" panose="02070309020205020404" pitchFamily="49" charset="0"/>
+                <a:cs typeface="Courier New" panose="02070309020205020404" pitchFamily="49" charset="0"/>
+                <a:sym typeface="Wingdings" panose="05000000000000000000" pitchFamily="2" charset="2"/>
               </a:rPr>
               <a:t>branchname</a:t>
             </a:r>
             <a:r>
-              <a:rPr lang="de-DE" sz="2800" b="1" dirty="0">
-                <a:latin typeface="Courier New" panose="02070309020205020404" pitchFamily="49" charset="0"/>
-                <a:cs typeface="Courier New" panose="02070309020205020404" pitchFamily="49" charset="0"/>
-              </a:rPr>
-              <a:t>&gt; </a:t>
-            </a:r>
-            <a:r>
-              <a:rPr lang="de-DE" dirty="0">
-                <a:sym typeface="Wingdings" panose="05000000000000000000" pitchFamily="2" charset="2"/>
-              </a:rPr>
-              <a:t> Erstellt einen neuen Zweig vom aktuellen Working-Dir und wechselt dort rein (oder </a:t>
-            </a:r>
-            <a:r>
-              <a:rPr lang="de-DE" sz="2700" b="1" dirty="0" err="1">
-                <a:latin typeface="Courier New" panose="02070309020205020404" pitchFamily="49" charset="0"/>
-                <a:cs typeface="Courier New" panose="02070309020205020404" pitchFamily="49" charset="0"/>
-                <a:sym typeface="Wingdings" panose="05000000000000000000" pitchFamily="2" charset="2"/>
-              </a:rPr>
-              <a:t>git</a:t>
-            </a:r>
-            <a:r>
-              <a:rPr lang="de-DE" sz="2700" b="1" dirty="0">
-                <a:latin typeface="Courier New" panose="02070309020205020404" pitchFamily="49" charset="0"/>
-                <a:cs typeface="Courier New" panose="02070309020205020404" pitchFamily="49" charset="0"/>
-                <a:sym typeface="Wingdings" panose="05000000000000000000" pitchFamily="2" charset="2"/>
-              </a:rPr>
-              <a:t> </a:t>
-            </a:r>
-            <a:r>
-              <a:rPr lang="de-DE" sz="2700" b="1" dirty="0" err="1">
-                <a:latin typeface="Courier New" panose="02070309020205020404" pitchFamily="49" charset="0"/>
-                <a:cs typeface="Courier New" panose="02070309020205020404" pitchFamily="49" charset="0"/>
-                <a:sym typeface="Wingdings" panose="05000000000000000000" pitchFamily="2" charset="2"/>
-              </a:rPr>
-              <a:t>branch</a:t>
-            </a:r>
-            <a:r>
-              <a:rPr lang="de-DE" sz="2700" b="1" dirty="0">
-                <a:latin typeface="Courier New" panose="02070309020205020404" pitchFamily="49" charset="0"/>
-                <a:cs typeface="Courier New" panose="02070309020205020404" pitchFamily="49" charset="0"/>
-                <a:sym typeface="Wingdings" panose="05000000000000000000" pitchFamily="2" charset="2"/>
-              </a:rPr>
-              <a:t> &lt;</a:t>
-            </a:r>
-            <a:r>
-              <a:rPr lang="de-DE" sz="2700" b="1" dirty="0" err="1">
-                <a:latin typeface="Courier New" panose="02070309020205020404" pitchFamily="49" charset="0"/>
-                <a:cs typeface="Courier New" panose="02070309020205020404" pitchFamily="49" charset="0"/>
-                <a:sym typeface="Wingdings" panose="05000000000000000000" pitchFamily="2" charset="2"/>
-              </a:rPr>
-              <a:t>branchname</a:t>
-            </a:r>
-            <a:r>
-              <a:rPr lang="de-DE" sz="2700" b="1" dirty="0">
+              <a:rPr lang="de-DE" sz="2900" b="1" dirty="0">
                 <a:latin typeface="Courier New" panose="02070309020205020404" pitchFamily="49" charset="0"/>
                 <a:cs typeface="Courier New" panose="02070309020205020404" pitchFamily="49" charset="0"/>
                 <a:sym typeface="Wingdings" panose="05000000000000000000" pitchFamily="2" charset="2"/>
@@ -4609,7 +5234,7 @@
 </p:sld>
 </file>
 
-<file path=ppt/slides/slide11.xml><?xml version="1.0" encoding="utf-8"?>
+<file path=ppt/slides/slide12.xml><?xml version="1.0" encoding="utf-8"?>
 <p:sld xmlns:a="http://schemas.openxmlformats.org/drawingml/2006/main" xmlns:r="http://schemas.openxmlformats.org/officeDocument/2006/relationships" xmlns:p="http://schemas.openxmlformats.org/presentationml/2006/main">
   <p:cSld>
     <p:spTree>
@@ -4685,110 +5310,325 @@
           <a:lstStyle/>
           <a:p>
             <a:r>
-              <a:rPr lang="de-DE"/>
+              <a:rPr lang="de-DE" dirty="0"/>
               <a:t>Mit Hilfe des </a:t>
             </a:r>
             <a:r>
-              <a:rPr lang="de-DE" sz="3000" b="1">
+              <a:rPr lang="de-DE" sz="3300" b="1" dirty="0" err="1">
                 <a:latin typeface="Courier New" panose="02070309020205020404" pitchFamily="49" charset="0"/>
                 <a:cs typeface="Courier New" panose="02070309020205020404" pitchFamily="49" charset="0"/>
               </a:rPr>
               <a:t>stash</a:t>
             </a:r>
             <a:r>
-              <a:rPr lang="de-DE"/>
+              <a:rPr lang="de-DE" dirty="0"/>
               <a:t> Befehls kann man Änderungen im Working-Dir wegsichern und auf den letzten Commit (</a:t>
             </a:r>
             <a:r>
-              <a:rPr lang="de-DE" sz="3000" b="1">
+              <a:rPr lang="de-DE" sz="3000" b="1" dirty="0">
                 <a:latin typeface="Courier New" panose="02070309020205020404" pitchFamily="49" charset="0"/>
                 <a:cs typeface="Courier New" panose="02070309020205020404" pitchFamily="49" charset="0"/>
               </a:rPr>
               <a:t>HEAD</a:t>
             </a:r>
             <a:r>
-              <a:rPr lang="de-DE"/>
+              <a:rPr lang="de-DE" dirty="0"/>
               <a:t>) zurücksetzen</a:t>
             </a:r>
           </a:p>
           <a:p>
             <a:r>
-              <a:rPr lang="de-DE"/>
+              <a:rPr lang="de-DE" dirty="0"/>
               <a:t>Mit </a:t>
             </a:r>
             <a:r>
-              <a:rPr lang="de-DE" sz="3000" b="1">
-                <a:latin typeface="Courier New" panose="02070309020205020404" pitchFamily="49" charset="0"/>
-                <a:cs typeface="Courier New" panose="02070309020205020404" pitchFamily="49" charset="0"/>
-              </a:rPr>
-              <a:t>git stash list </a:t>
-            </a:r>
-            <a:r>
-              <a:rPr lang="de-DE"/>
-              <a:t>kann man sich seine "Stashes" anzeigen lassen</a:t>
-            </a:r>
-          </a:p>
-          <a:p>
-            <a:r>
-              <a:rPr lang="de-DE"/>
+              <a:rPr lang="de-DE" sz="3300" b="1" dirty="0" err="1">
+                <a:latin typeface="Courier New" panose="02070309020205020404" pitchFamily="49" charset="0"/>
+                <a:cs typeface="Courier New" panose="02070309020205020404" pitchFamily="49" charset="0"/>
+              </a:rPr>
+              <a:t>git</a:t>
+            </a:r>
+            <a:r>
+              <a:rPr lang="de-DE" sz="3300" b="1" dirty="0">
+                <a:latin typeface="Courier New" panose="02070309020205020404" pitchFamily="49" charset="0"/>
+                <a:cs typeface="Courier New" panose="02070309020205020404" pitchFamily="49" charset="0"/>
+              </a:rPr>
+              <a:t> </a:t>
+            </a:r>
+            <a:r>
+              <a:rPr lang="de-DE" sz="3300" b="1" dirty="0" err="1">
+                <a:latin typeface="Courier New" panose="02070309020205020404" pitchFamily="49" charset="0"/>
+                <a:cs typeface="Courier New" panose="02070309020205020404" pitchFamily="49" charset="0"/>
+              </a:rPr>
+              <a:t>stash</a:t>
+            </a:r>
+            <a:r>
+              <a:rPr lang="de-DE" sz="3300" b="1" dirty="0">
+                <a:latin typeface="Courier New" panose="02070309020205020404" pitchFamily="49" charset="0"/>
+                <a:cs typeface="Courier New" panose="02070309020205020404" pitchFamily="49" charset="0"/>
+              </a:rPr>
+              <a:t> </a:t>
+            </a:r>
+            <a:r>
+              <a:rPr lang="de-DE" sz="3300" b="1" dirty="0" err="1">
+                <a:latin typeface="Courier New" panose="02070309020205020404" pitchFamily="49" charset="0"/>
+                <a:cs typeface="Courier New" panose="02070309020205020404" pitchFamily="49" charset="0"/>
+              </a:rPr>
+              <a:t>list</a:t>
+            </a:r>
+            <a:r>
+              <a:rPr lang="de-DE" sz="3300" b="1" dirty="0">
+                <a:latin typeface="Courier New" panose="02070309020205020404" pitchFamily="49" charset="0"/>
+                <a:cs typeface="Courier New" panose="02070309020205020404" pitchFamily="49" charset="0"/>
+              </a:rPr>
+              <a:t> </a:t>
+            </a:r>
+            <a:r>
+              <a:rPr lang="de-DE" dirty="0"/>
+              <a:t>kann man sich seine "</a:t>
+            </a:r>
+            <a:r>
+              <a:rPr lang="de-DE" dirty="0" err="1"/>
+              <a:t>Stashes</a:t>
+            </a:r>
+            <a:r>
+              <a:rPr lang="de-DE" dirty="0"/>
+              <a:t>" anzeigen lassen</a:t>
+            </a:r>
+          </a:p>
+          <a:p>
+            <a:r>
+              <a:rPr lang="de-DE" dirty="0"/>
               <a:t>Mit </a:t>
             </a:r>
             <a:r>
-              <a:rPr lang="de-DE" sz="3000" b="1">
-                <a:latin typeface="Courier New" panose="02070309020205020404" pitchFamily="49" charset="0"/>
-                <a:cs typeface="Courier New" panose="02070309020205020404" pitchFamily="49" charset="0"/>
-              </a:rPr>
-              <a:t>git stash pop &lt;stash&gt; </a:t>
-            </a:r>
-            <a:r>
-              <a:rPr lang="de-DE"/>
-              <a:t>kann man einen Stash auf das dann aktuelle Working-Dir anwenden (d.h. es kann dann auch zu Konfliken kommen)</a:t>
+              <a:rPr lang="de-DE" sz="3000" b="1" dirty="0" err="1">
+                <a:latin typeface="Courier New" panose="02070309020205020404" pitchFamily="49" charset="0"/>
+                <a:cs typeface="Courier New" panose="02070309020205020404" pitchFamily="49" charset="0"/>
+              </a:rPr>
+              <a:t>git</a:t>
+            </a:r>
+            <a:r>
+              <a:rPr lang="de-DE" sz="3000" b="1" dirty="0">
+                <a:latin typeface="Courier New" panose="02070309020205020404" pitchFamily="49" charset="0"/>
+                <a:cs typeface="Courier New" panose="02070309020205020404" pitchFamily="49" charset="0"/>
+              </a:rPr>
+              <a:t> </a:t>
+            </a:r>
+            <a:r>
+              <a:rPr lang="de-DE" sz="3000" b="1" dirty="0" err="1">
+                <a:latin typeface="Courier New" panose="02070309020205020404" pitchFamily="49" charset="0"/>
+                <a:cs typeface="Courier New" panose="02070309020205020404" pitchFamily="49" charset="0"/>
+              </a:rPr>
+              <a:t>stash</a:t>
+            </a:r>
+            <a:r>
+              <a:rPr lang="de-DE" sz="3000" b="1" dirty="0">
+                <a:latin typeface="Courier New" panose="02070309020205020404" pitchFamily="49" charset="0"/>
+                <a:cs typeface="Courier New" panose="02070309020205020404" pitchFamily="49" charset="0"/>
+              </a:rPr>
+              <a:t> </a:t>
+            </a:r>
+            <a:r>
+              <a:rPr lang="de-DE" sz="3000" b="1" dirty="0" err="1">
+                <a:latin typeface="Courier New" panose="02070309020205020404" pitchFamily="49" charset="0"/>
+                <a:cs typeface="Courier New" panose="02070309020205020404" pitchFamily="49" charset="0"/>
+              </a:rPr>
+              <a:t>pop</a:t>
+            </a:r>
+            <a:r>
+              <a:rPr lang="de-DE" sz="3000" b="1" dirty="0">
+                <a:latin typeface="Courier New" panose="02070309020205020404" pitchFamily="49" charset="0"/>
+                <a:cs typeface="Courier New" panose="02070309020205020404" pitchFamily="49" charset="0"/>
+              </a:rPr>
+              <a:t> &lt;</a:t>
+            </a:r>
+            <a:r>
+              <a:rPr lang="de-DE" sz="3000" b="1" dirty="0" err="1">
+                <a:latin typeface="Courier New" panose="02070309020205020404" pitchFamily="49" charset="0"/>
+                <a:cs typeface="Courier New" panose="02070309020205020404" pitchFamily="49" charset="0"/>
+              </a:rPr>
+              <a:t>stash</a:t>
+            </a:r>
+            <a:r>
+              <a:rPr lang="de-DE" sz="3000" b="1" dirty="0">
+                <a:latin typeface="Courier New" panose="02070309020205020404" pitchFamily="49" charset="0"/>
+                <a:cs typeface="Courier New" panose="02070309020205020404" pitchFamily="49" charset="0"/>
+              </a:rPr>
+              <a:t>&gt; </a:t>
+            </a:r>
+            <a:r>
+              <a:rPr lang="de-DE" dirty="0"/>
+              <a:t>kann man einen </a:t>
+            </a:r>
+            <a:r>
+              <a:rPr lang="de-DE" dirty="0" err="1"/>
+              <a:t>Stash</a:t>
+            </a:r>
+            <a:r>
+              <a:rPr lang="de-DE" dirty="0"/>
+              <a:t> auf das dann aktuelle Working-Dir anwenden (d.h. es kann dann auch zu Konflikten kommen)</a:t>
             </a:r>
             <a:br>
-              <a:rPr lang="de-DE"/>
+              <a:rPr lang="de-DE" dirty="0"/>
             </a:br>
             <a:r>
-              <a:rPr lang="de-DE" sz="2600" i="1" u="sng"/>
+              <a:rPr lang="de-DE" sz="2600" i="1" u="sng" dirty="0"/>
               <a:t>Hinweis</a:t>
             </a:r>
             <a:r>
-              <a:rPr lang="de-DE" sz="2600" i="1"/>
+              <a:rPr lang="de-DE" sz="2600" i="1" dirty="0"/>
               <a:t>: Sollte nach einem späteren Versuch mit </a:t>
             </a:r>
             <a:r>
-              <a:rPr lang="de-DE" sz="2300" b="1">
-                <a:latin typeface="Courier New" panose="02070309020205020404" pitchFamily="49" charset="0"/>
-                <a:cs typeface="Courier New" panose="02070309020205020404" pitchFamily="49" charset="0"/>
-              </a:rPr>
-              <a:t>git checkout *.* </a:t>
-            </a:r>
-            <a:r>
-              <a:rPr lang="de-DE" sz="2600" i="1"/>
-              <a:t>auf den HEAD zurückzukehren ein Merge-Error angezeigt werden, kann das Working Dir mit </a:t>
-            </a:r>
-            <a:r>
-              <a:rPr lang="de-DE" sz="2300" b="1">
-                <a:latin typeface="Courier New" panose="02070309020205020404" pitchFamily="49" charset="0"/>
-                <a:cs typeface="Courier New" panose="02070309020205020404" pitchFamily="49" charset="0"/>
-              </a:rPr>
-              <a:t>git reset *.* </a:t>
-            </a:r>
-            <a:r>
-              <a:rPr lang="de-DE" sz="2600" i="1"/>
-              <a:t>zurückgesetzt werden, damit der checkout wieder funktioniert.</a:t>
-            </a:r>
-          </a:p>
-          <a:p>
-            <a:r>
-              <a:rPr lang="de-DE" sz="3000" b="1">
-                <a:latin typeface="Courier New" panose="02070309020205020404" pitchFamily="49" charset="0"/>
-                <a:cs typeface="Courier New" panose="02070309020205020404" pitchFamily="49" charset="0"/>
-              </a:rPr>
-              <a:t>git stash drop &lt;stash&gt; </a:t>
-            </a:r>
-            <a:r>
-              <a:rPr lang="de-DE"/>
-              <a:t>kann ein Stash gelöscht werden. </a:t>
+              <a:rPr lang="de-DE" sz="2300" b="1" dirty="0" err="1">
+                <a:latin typeface="Courier New" panose="02070309020205020404" pitchFamily="49" charset="0"/>
+                <a:cs typeface="Courier New" panose="02070309020205020404" pitchFamily="49" charset="0"/>
+              </a:rPr>
+              <a:t>git</a:t>
+            </a:r>
+            <a:r>
+              <a:rPr lang="de-DE" sz="2300" b="1" dirty="0">
+                <a:latin typeface="Courier New" panose="02070309020205020404" pitchFamily="49" charset="0"/>
+                <a:cs typeface="Courier New" panose="02070309020205020404" pitchFamily="49" charset="0"/>
+              </a:rPr>
+              <a:t> </a:t>
+            </a:r>
+            <a:r>
+              <a:rPr lang="de-DE" sz="2300" b="1" dirty="0" err="1">
+                <a:latin typeface="Courier New" panose="02070309020205020404" pitchFamily="49" charset="0"/>
+                <a:cs typeface="Courier New" panose="02070309020205020404" pitchFamily="49" charset="0"/>
+              </a:rPr>
+              <a:t>checkout</a:t>
+            </a:r>
+            <a:r>
+              <a:rPr lang="de-DE" sz="2300" b="1" dirty="0">
+                <a:latin typeface="Courier New" panose="02070309020205020404" pitchFamily="49" charset="0"/>
+                <a:cs typeface="Courier New" panose="02070309020205020404" pitchFamily="49" charset="0"/>
+              </a:rPr>
+              <a:t> *.* </a:t>
+            </a:r>
+            <a:r>
+              <a:rPr lang="de-DE" sz="2600" i="1" dirty="0"/>
+              <a:t>auf den HEAD zurückzukehren ein </a:t>
+            </a:r>
+            <a:r>
+              <a:rPr lang="de-DE" sz="2600" i="1" dirty="0" err="1"/>
+              <a:t>Merge</a:t>
+            </a:r>
+            <a:r>
+              <a:rPr lang="de-DE" sz="2600" i="1" dirty="0"/>
+              <a:t>-Error angezeigt werden, kann das Working Dir mit </a:t>
+            </a:r>
+            <a:r>
+              <a:rPr lang="de-DE" sz="2300" b="1" dirty="0" err="1">
+                <a:latin typeface="Courier New" panose="02070309020205020404" pitchFamily="49" charset="0"/>
+                <a:cs typeface="Courier New" panose="02070309020205020404" pitchFamily="49" charset="0"/>
+              </a:rPr>
+              <a:t>git</a:t>
+            </a:r>
+            <a:r>
+              <a:rPr lang="de-DE" sz="2300" b="1" dirty="0">
+                <a:latin typeface="Courier New" panose="02070309020205020404" pitchFamily="49" charset="0"/>
+                <a:cs typeface="Courier New" panose="02070309020205020404" pitchFamily="49" charset="0"/>
+              </a:rPr>
+              <a:t> </a:t>
+            </a:r>
+            <a:r>
+              <a:rPr lang="de-DE" sz="2300" b="1" dirty="0" err="1">
+                <a:latin typeface="Courier New" panose="02070309020205020404" pitchFamily="49" charset="0"/>
+                <a:cs typeface="Courier New" panose="02070309020205020404" pitchFamily="49" charset="0"/>
+              </a:rPr>
+              <a:t>reset</a:t>
+            </a:r>
+            <a:r>
+              <a:rPr lang="de-DE" sz="2300" b="1" dirty="0">
+                <a:latin typeface="Courier New" panose="02070309020205020404" pitchFamily="49" charset="0"/>
+                <a:cs typeface="Courier New" panose="02070309020205020404" pitchFamily="49" charset="0"/>
+              </a:rPr>
+              <a:t> *.* </a:t>
+            </a:r>
+            <a:r>
+              <a:rPr lang="de-DE" sz="2600" i="1" dirty="0"/>
+              <a:t>zurückgesetzt werden, damit der </a:t>
+            </a:r>
+            <a:r>
+              <a:rPr lang="de-DE" sz="2600" i="1" dirty="0" err="1"/>
+              <a:t>Checkout</a:t>
+            </a:r>
+            <a:r>
+              <a:rPr lang="de-DE" sz="2600" i="1" dirty="0"/>
+              <a:t> wieder funktioniert.</a:t>
+            </a:r>
+          </a:p>
+          <a:p>
+            <a:r>
+              <a:rPr lang="de-DE" sz="3000" b="1" dirty="0" err="1">
+                <a:latin typeface="Courier New" panose="02070309020205020404" pitchFamily="49" charset="0"/>
+                <a:cs typeface="Courier New" panose="02070309020205020404" pitchFamily="49" charset="0"/>
+              </a:rPr>
+              <a:t>git</a:t>
+            </a:r>
+            <a:r>
+              <a:rPr lang="de-DE" sz="3000" b="1" dirty="0">
+                <a:latin typeface="Courier New" panose="02070309020205020404" pitchFamily="49" charset="0"/>
+                <a:cs typeface="Courier New" panose="02070309020205020404" pitchFamily="49" charset="0"/>
+              </a:rPr>
+              <a:t> </a:t>
+            </a:r>
+            <a:r>
+              <a:rPr lang="de-DE" sz="3000" b="1" dirty="0" err="1">
+                <a:latin typeface="Courier New" panose="02070309020205020404" pitchFamily="49" charset="0"/>
+                <a:cs typeface="Courier New" panose="02070309020205020404" pitchFamily="49" charset="0"/>
+              </a:rPr>
+              <a:t>stash</a:t>
+            </a:r>
+            <a:r>
+              <a:rPr lang="de-DE" sz="3000" b="1" dirty="0">
+                <a:latin typeface="Courier New" panose="02070309020205020404" pitchFamily="49" charset="0"/>
+                <a:cs typeface="Courier New" panose="02070309020205020404" pitchFamily="49" charset="0"/>
+              </a:rPr>
+              <a:t> </a:t>
+            </a:r>
+            <a:r>
+              <a:rPr lang="de-DE" sz="3000" b="1" dirty="0" err="1">
+                <a:latin typeface="Courier New" panose="02070309020205020404" pitchFamily="49" charset="0"/>
+                <a:cs typeface="Courier New" panose="02070309020205020404" pitchFamily="49" charset="0"/>
+              </a:rPr>
+              <a:t>drop</a:t>
+            </a:r>
+            <a:r>
+              <a:rPr lang="de-DE" sz="3000" b="1" dirty="0">
+                <a:latin typeface="Courier New" panose="02070309020205020404" pitchFamily="49" charset="0"/>
+                <a:cs typeface="Courier New" panose="02070309020205020404" pitchFamily="49" charset="0"/>
+              </a:rPr>
+              <a:t> &lt;</a:t>
+            </a:r>
+            <a:r>
+              <a:rPr lang="de-DE" sz="3000" b="1" dirty="0" err="1">
+                <a:latin typeface="Courier New" panose="02070309020205020404" pitchFamily="49" charset="0"/>
+                <a:cs typeface="Courier New" panose="02070309020205020404" pitchFamily="49" charset="0"/>
+              </a:rPr>
+              <a:t>stash</a:t>
+            </a:r>
+            <a:r>
+              <a:rPr lang="de-DE" sz="3000" b="1" dirty="0">
+                <a:latin typeface="Courier New" panose="02070309020205020404" pitchFamily="49" charset="0"/>
+                <a:cs typeface="Courier New" panose="02070309020205020404" pitchFamily="49" charset="0"/>
+              </a:rPr>
+              <a:t>&gt; </a:t>
+            </a:r>
+            <a:r>
+              <a:rPr lang="de-DE" dirty="0"/>
+              <a:t>kann ein </a:t>
+            </a:r>
+            <a:r>
+              <a:rPr lang="de-DE" dirty="0" err="1"/>
+              <a:t>Stash</a:t>
+            </a:r>
+            <a:r>
+              <a:rPr lang="de-DE" dirty="0"/>
+              <a:t> gelöscht werden. </a:t>
             </a:r>
           </a:p>
         </p:txBody>
@@ -4806,7 +5646,7 @@
 </p:sld>
 </file>
 
-<file path=ppt/slides/slide12.xml><?xml version="1.0" encoding="utf-8"?>
+<file path=ppt/slides/slide13.xml><?xml version="1.0" encoding="utf-8"?>
 <p:sld xmlns:a="http://schemas.openxmlformats.org/drawingml/2006/main" xmlns:r="http://schemas.openxmlformats.org/officeDocument/2006/relationships" xmlns:p="http://schemas.openxmlformats.org/presentationml/2006/main">
   <p:cSld>
     <p:spTree>
@@ -5592,7 +6432,7 @@
 </p:sld>
 </file>
 
-<file path=ppt/slides/slide13.xml><?xml version="1.0" encoding="utf-8"?>
+<file path=ppt/slides/slide14.xml><?xml version="1.0" encoding="utf-8"?>
 <p:sld xmlns:a="http://schemas.openxmlformats.org/drawingml/2006/main" xmlns:r="http://schemas.openxmlformats.org/officeDocument/2006/relationships" xmlns:p="http://schemas.openxmlformats.org/presentationml/2006/main">
   <p:cSld>
     <p:spTree>
@@ -5854,7 +6694,7 @@
 </p:sld>
 </file>
 
-<file path=ppt/slides/slide14.xml><?xml version="1.0" encoding="utf-8"?>
+<file path=ppt/slides/slide15.xml><?xml version="1.0" encoding="utf-8"?>
 <p:sld xmlns:a="http://schemas.openxmlformats.org/drawingml/2006/main" xmlns:r="http://schemas.openxmlformats.org/officeDocument/2006/relationships" xmlns:p="http://schemas.openxmlformats.org/presentationml/2006/main">
   <p:cSld>
     <p:spTree>
@@ -6093,7 +6933,7 @@
 </p:sld>
 </file>
 
-<file path=ppt/slides/slide15.xml><?xml version="1.0" encoding="utf-8"?>
+<file path=ppt/slides/slide16.xml><?xml version="1.0" encoding="utf-8"?>
 <p:sld xmlns:a="http://schemas.openxmlformats.org/drawingml/2006/main" xmlns:r="http://schemas.openxmlformats.org/officeDocument/2006/relationships" xmlns:p="http://schemas.openxmlformats.org/presentationml/2006/main">
   <p:cSld>
     <p:spTree>
@@ -6196,7 +7036,7 @@
 </p:sld>
 </file>
 
-<file path=ppt/slides/slide16.xml><?xml version="1.0" encoding="utf-8"?>
+<file path=ppt/slides/slide17.xml><?xml version="1.0" encoding="utf-8"?>
 <p:sld xmlns:a="http://schemas.openxmlformats.org/drawingml/2006/main" xmlns:r="http://schemas.openxmlformats.org/officeDocument/2006/relationships" xmlns:p="http://schemas.openxmlformats.org/presentationml/2006/main">
   <p:cSld>
     <p:spTree>
@@ -6238,15 +7078,7 @@
           <a:p>
             <a:r>
               <a:rPr lang="de-DE" dirty="0"/>
-              <a:t>push des Projekts zum </a:t>
-            </a:r>
-            <a:r>
-              <a:rPr lang="de-DE" dirty="0" err="1"/>
-              <a:t>Github</a:t>
-            </a:r>
-            <a:r>
-              <a:rPr lang="de-DE" dirty="0"/>
-              <a:t>-Server</a:t>
+              <a:t>push des Projekts zum Github.com-Server</a:t>
             </a:r>
           </a:p>
         </p:txBody>
@@ -6482,7 +7314,7 @@
 </p:sld>
 </file>
 
-<file path=ppt/slides/slide17.xml><?xml version="1.0" encoding="utf-8"?>
+<file path=ppt/slides/slide18.xml><?xml version="1.0" encoding="utf-8"?>
 <p:sld xmlns:a="http://schemas.openxmlformats.org/drawingml/2006/main" xmlns:r="http://schemas.openxmlformats.org/officeDocument/2006/relationships" xmlns:p="http://schemas.openxmlformats.org/presentationml/2006/main">
   <p:cSld>
     <p:spTree>
@@ -6556,8 +7388,8 @@
         </p:nvSpPr>
         <p:spPr>
           <a:xfrm>
-            <a:off x="457200" y="1600200"/>
-            <a:ext cx="8229600" cy="5141168"/>
+            <a:off x="251520" y="1600200"/>
+            <a:ext cx="8784976" cy="5213176"/>
           </a:xfrm>
         </p:spPr>
         <p:txBody>
@@ -6726,7 +7558,7 @@
             </a:r>
             <a:r>
               <a:rPr lang="de-DE" dirty="0"/>
-              <a:t>auf dem neuesten Stand gebracht werden bzw. mit </a:t>
+              <a:t>auf dem neuesten Stand gebracht werden bzw. nach Weiterentwicklung mit </a:t>
             </a:r>
             <a:r>
               <a:rPr lang="de-DE" sz="2600" b="1" dirty="0" err="1">
@@ -6842,7 +7674,7 @@
 </p:sld>
 </file>
 
-<file path=ppt/slides/slide18.xml><?xml version="1.0" encoding="utf-8"?>
+<file path=ppt/slides/slide19.xml><?xml version="1.0" encoding="utf-8"?>
 <p:sld xmlns:a="http://schemas.openxmlformats.org/drawingml/2006/main" xmlns:r="http://schemas.openxmlformats.org/officeDocument/2006/relationships" xmlns:p="http://schemas.openxmlformats.org/presentationml/2006/main">
   <p:cSld>
     <p:spTree>
@@ -7269,7 +8101,209 @@
 </p:sld>
 </file>
 
-<file path=ppt/slides/slide19.xml><?xml version="1.0" encoding="utf-8"?>
+<file path=ppt/slides/slide2.xml><?xml version="1.0" encoding="utf-8"?>
+<p:sld xmlns:a="http://schemas.openxmlformats.org/drawingml/2006/main" xmlns:r="http://schemas.openxmlformats.org/officeDocument/2006/relationships" xmlns:p="http://schemas.openxmlformats.org/presentationml/2006/main">
+  <p:cSld>
+    <p:spTree>
+      <p:nvGrpSpPr>
+        <p:cNvPr id="1" name=""/>
+        <p:cNvGrpSpPr/>
+        <p:nvPr/>
+      </p:nvGrpSpPr>
+      <p:grpSpPr>
+        <a:xfrm>
+          <a:off x="0" y="0"/>
+          <a:ext cx="0" cy="0"/>
+          <a:chOff x="0" y="0"/>
+          <a:chExt cx="0" cy="0"/>
+        </a:xfrm>
+      </p:grpSpPr>
+      <p:sp>
+        <p:nvSpPr>
+          <p:cNvPr id="2" name="Titel 1"/>
+          <p:cNvSpPr>
+            <a:spLocks noGrp="1"/>
+          </p:cNvSpPr>
+          <p:nvPr>
+            <p:ph type="title"/>
+          </p:nvPr>
+        </p:nvSpPr>
+        <p:spPr/>
+        <p:txBody>
+          <a:bodyPr/>
+          <a:lstStyle/>
+          <a:p>
+            <a:r>
+              <a:rPr lang="de-DE" dirty="0"/>
+              <a:t>Agenda</a:t>
+            </a:r>
+          </a:p>
+        </p:txBody>
+      </p:sp>
+      <p:sp>
+        <p:nvSpPr>
+          <p:cNvPr id="3" name="Inhaltsplatzhalter 2"/>
+          <p:cNvSpPr>
+            <a:spLocks noGrp="1"/>
+          </p:cNvSpPr>
+          <p:nvPr>
+            <p:ph idx="1"/>
+          </p:nvPr>
+        </p:nvSpPr>
+        <p:spPr>
+          <a:xfrm>
+            <a:off x="457200" y="1600200"/>
+            <a:ext cx="8229600" cy="5141168"/>
+          </a:xfrm>
+        </p:spPr>
+        <p:txBody>
+          <a:bodyPr>
+            <a:normAutofit fontScale="85000" lnSpcReduction="20000"/>
+          </a:bodyPr>
+          <a:lstStyle/>
+          <a:p>
+            <a:r>
+              <a:rPr lang="de-DE" dirty="0"/>
+              <a:t>Grundlagen </a:t>
+            </a:r>
+            <a:r>
+              <a:rPr lang="de-DE"/>
+              <a:t>und Anwendungsfälle </a:t>
+            </a:r>
+            <a:r>
+              <a:rPr lang="de-DE" dirty="0"/>
+              <a:t>von </a:t>
+            </a:r>
+            <a:r>
+              <a:rPr lang="de-DE" b="1" dirty="0" err="1">
+                <a:latin typeface="Courier New" panose="02070309020205020404" pitchFamily="49" charset="0"/>
+                <a:cs typeface="Courier New" panose="02070309020205020404" pitchFamily="49" charset="0"/>
+              </a:rPr>
+              <a:t>git</a:t>
+            </a:r>
+            <a:endParaRPr lang="de-DE" b="1" dirty="0">
+              <a:latin typeface="Courier New" panose="02070309020205020404" pitchFamily="49" charset="0"/>
+              <a:cs typeface="Courier New" panose="02070309020205020404" pitchFamily="49" charset="0"/>
+            </a:endParaRPr>
+          </a:p>
+          <a:p>
+            <a:r>
+              <a:rPr lang="de-DE"/>
+              <a:t>Installation und Konfiguration</a:t>
+            </a:r>
+            <a:endParaRPr lang="de-DE" dirty="0"/>
+          </a:p>
+          <a:p>
+            <a:r>
+              <a:rPr lang="de-DE"/>
+              <a:t>Wichtigste Begriffe und Befehle</a:t>
+            </a:r>
+            <a:endParaRPr lang="de-DE" dirty="0"/>
+          </a:p>
+          <a:p>
+            <a:r>
+              <a:rPr lang="de-DE"/>
+              <a:t>Grundablauf der Versionsverwaltung</a:t>
+            </a:r>
+          </a:p>
+          <a:p>
+            <a:pPr lvl="1"/>
+            <a:r>
+              <a:rPr lang="de-DE"/>
+              <a:t>Committen (Commits erstellen)</a:t>
+            </a:r>
+          </a:p>
+          <a:p>
+            <a:pPr lvl="1"/>
+            <a:r>
+              <a:rPr lang="de-DE"/>
+              <a:t>Checkout (Dateien wiederherstellen)</a:t>
+            </a:r>
+          </a:p>
+          <a:p>
+            <a:pPr lvl="1"/>
+            <a:r>
+              <a:rPr lang="de-DE"/>
+              <a:t>Stashen (Dateien ablegen)</a:t>
+            </a:r>
+          </a:p>
+          <a:p>
+            <a:pPr lvl="1"/>
+            <a:r>
+              <a:rPr lang="de-DE"/>
+              <a:t>Branches und Merge</a:t>
+            </a:r>
+          </a:p>
+          <a:p>
+            <a:r>
+              <a:rPr lang="de-DE"/>
+              <a:t>Grafische </a:t>
+            </a:r>
+            <a:r>
+              <a:rPr lang="de-DE" dirty="0"/>
+              <a:t>Oberflächen </a:t>
+            </a:r>
+            <a:r>
+              <a:rPr lang="de-DE" b="1" dirty="0" err="1">
+                <a:latin typeface="Courier New" panose="02070309020205020404" pitchFamily="49" charset="0"/>
+                <a:cs typeface="Courier New" panose="02070309020205020404" pitchFamily="49" charset="0"/>
+              </a:rPr>
+              <a:t>gitk</a:t>
+            </a:r>
+            <a:r>
+              <a:rPr lang="de-DE" dirty="0"/>
+              <a:t> und </a:t>
+            </a:r>
+            <a:r>
+              <a:rPr lang="de-DE" b="1" dirty="0" err="1">
+                <a:latin typeface="Courier New" panose="02070309020205020404" pitchFamily="49" charset="0"/>
+                <a:cs typeface="Courier New" panose="02070309020205020404" pitchFamily="49" charset="0"/>
+              </a:rPr>
+              <a:t>git-gui</a:t>
+            </a:r>
+            <a:endParaRPr lang="de-DE" b="1" dirty="0">
+              <a:latin typeface="Courier New" panose="02070309020205020404" pitchFamily="49" charset="0"/>
+              <a:cs typeface="Courier New" panose="02070309020205020404" pitchFamily="49" charset="0"/>
+            </a:endParaRPr>
+          </a:p>
+          <a:p>
+            <a:r>
+              <a:rPr lang="de-DE"/>
+              <a:t>GitHub.com</a:t>
+            </a:r>
+          </a:p>
+          <a:p>
+            <a:r>
+              <a:rPr lang="de-DE"/>
+              <a:t>Hochladen und Runterladen von Remote-Repositories</a:t>
+            </a:r>
+            <a:endParaRPr lang="de-DE" dirty="0"/>
+          </a:p>
+          <a:p>
+            <a:r>
+              <a:rPr lang="de-DE" dirty="0"/>
+              <a:t>Links und Tutorials</a:t>
+            </a:r>
+          </a:p>
+          <a:p>
+            <a:endParaRPr lang="de-DE" dirty="0"/>
+          </a:p>
+        </p:txBody>
+      </p:sp>
+    </p:spTree>
+    <p:extLst>
+      <p:ext uri="{BB962C8B-B14F-4D97-AF65-F5344CB8AC3E}">
+        <p14:creationId xmlns:p14="http://schemas.microsoft.com/office/powerpoint/2010/main" val="1280278103"/>
+      </p:ext>
+    </p:extLst>
+  </p:cSld>
+  <p:clrMapOvr>
+    <a:masterClrMapping/>
+  </p:clrMapOvr>
+</p:sld>
+</file>
+
+<file path=ppt/slides/slide20.xml><?xml version="1.0" encoding="utf-8"?>
 <p:sld xmlns:a="http://schemas.openxmlformats.org/drawingml/2006/main" xmlns:r="http://schemas.openxmlformats.org/officeDocument/2006/relationships" xmlns:p="http://schemas.openxmlformats.org/presentationml/2006/main">
   <p:cSld>
     <p:spTree>
@@ -7659,209 +8693,7 @@
 </p:sld>
 </file>
 
-<file path=ppt/slides/slide2.xml><?xml version="1.0" encoding="utf-8"?>
-<p:sld xmlns:a="http://schemas.openxmlformats.org/drawingml/2006/main" xmlns:r="http://schemas.openxmlformats.org/officeDocument/2006/relationships" xmlns:p="http://schemas.openxmlformats.org/presentationml/2006/main">
-  <p:cSld>
-    <p:spTree>
-      <p:nvGrpSpPr>
-        <p:cNvPr id="1" name=""/>
-        <p:cNvGrpSpPr/>
-        <p:nvPr/>
-      </p:nvGrpSpPr>
-      <p:grpSpPr>
-        <a:xfrm>
-          <a:off x="0" y="0"/>
-          <a:ext cx="0" cy="0"/>
-          <a:chOff x="0" y="0"/>
-          <a:chExt cx="0" cy="0"/>
-        </a:xfrm>
-      </p:grpSpPr>
-      <p:sp>
-        <p:nvSpPr>
-          <p:cNvPr id="2" name="Titel 1"/>
-          <p:cNvSpPr>
-            <a:spLocks noGrp="1"/>
-          </p:cNvSpPr>
-          <p:nvPr>
-            <p:ph type="title"/>
-          </p:nvPr>
-        </p:nvSpPr>
-        <p:spPr/>
-        <p:txBody>
-          <a:bodyPr/>
-          <a:lstStyle/>
-          <a:p>
-            <a:r>
-              <a:rPr lang="de-DE" dirty="0"/>
-              <a:t>Agenda</a:t>
-            </a:r>
-          </a:p>
-        </p:txBody>
-      </p:sp>
-      <p:sp>
-        <p:nvSpPr>
-          <p:cNvPr id="3" name="Inhaltsplatzhalter 2"/>
-          <p:cNvSpPr>
-            <a:spLocks noGrp="1"/>
-          </p:cNvSpPr>
-          <p:nvPr>
-            <p:ph idx="1"/>
-          </p:nvPr>
-        </p:nvSpPr>
-        <p:spPr>
-          <a:xfrm>
-            <a:off x="457200" y="1600200"/>
-            <a:ext cx="8229600" cy="5141168"/>
-          </a:xfrm>
-        </p:spPr>
-        <p:txBody>
-          <a:bodyPr>
-            <a:normAutofit fontScale="85000" lnSpcReduction="20000"/>
-          </a:bodyPr>
-          <a:lstStyle/>
-          <a:p>
-            <a:r>
-              <a:rPr lang="de-DE" dirty="0"/>
-              <a:t>Grundlagen </a:t>
-            </a:r>
-            <a:r>
-              <a:rPr lang="de-DE"/>
-              <a:t>und Anwendungsfälle </a:t>
-            </a:r>
-            <a:r>
-              <a:rPr lang="de-DE" dirty="0"/>
-              <a:t>von </a:t>
-            </a:r>
-            <a:r>
-              <a:rPr lang="de-DE" b="1" dirty="0" err="1">
-                <a:latin typeface="Courier New" panose="02070309020205020404" pitchFamily="49" charset="0"/>
-                <a:cs typeface="Courier New" panose="02070309020205020404" pitchFamily="49" charset="0"/>
-              </a:rPr>
-              <a:t>git</a:t>
-            </a:r>
-            <a:endParaRPr lang="de-DE" b="1" dirty="0">
-              <a:latin typeface="Courier New" panose="02070309020205020404" pitchFamily="49" charset="0"/>
-              <a:cs typeface="Courier New" panose="02070309020205020404" pitchFamily="49" charset="0"/>
-            </a:endParaRPr>
-          </a:p>
-          <a:p>
-            <a:r>
-              <a:rPr lang="de-DE"/>
-              <a:t>Installation und Konfiguration</a:t>
-            </a:r>
-            <a:endParaRPr lang="de-DE" dirty="0"/>
-          </a:p>
-          <a:p>
-            <a:r>
-              <a:rPr lang="de-DE"/>
-              <a:t>Wichtigste Begriffe und Befehle</a:t>
-            </a:r>
-            <a:endParaRPr lang="de-DE" dirty="0"/>
-          </a:p>
-          <a:p>
-            <a:r>
-              <a:rPr lang="de-DE"/>
-              <a:t>Grundablauf der Versionsverwaltung</a:t>
-            </a:r>
-          </a:p>
-          <a:p>
-            <a:pPr lvl="1"/>
-            <a:r>
-              <a:rPr lang="de-DE"/>
-              <a:t>Committen (Commits erstellen)</a:t>
-            </a:r>
-          </a:p>
-          <a:p>
-            <a:pPr lvl="1"/>
-            <a:r>
-              <a:rPr lang="de-DE"/>
-              <a:t>Checkout (Dateien wiederherstellen)</a:t>
-            </a:r>
-          </a:p>
-          <a:p>
-            <a:pPr lvl="1"/>
-            <a:r>
-              <a:rPr lang="de-DE"/>
-              <a:t>Stashen (Dateien ablegen)</a:t>
-            </a:r>
-          </a:p>
-          <a:p>
-            <a:pPr lvl="1"/>
-            <a:r>
-              <a:rPr lang="de-DE"/>
-              <a:t>Branches und Merge</a:t>
-            </a:r>
-          </a:p>
-          <a:p>
-            <a:r>
-              <a:rPr lang="de-DE"/>
-              <a:t>Grafische </a:t>
-            </a:r>
-            <a:r>
-              <a:rPr lang="de-DE" dirty="0"/>
-              <a:t>Oberflächen </a:t>
-            </a:r>
-            <a:r>
-              <a:rPr lang="de-DE" b="1" dirty="0" err="1">
-                <a:latin typeface="Courier New" panose="02070309020205020404" pitchFamily="49" charset="0"/>
-                <a:cs typeface="Courier New" panose="02070309020205020404" pitchFamily="49" charset="0"/>
-              </a:rPr>
-              <a:t>gitk</a:t>
-            </a:r>
-            <a:r>
-              <a:rPr lang="de-DE" dirty="0"/>
-              <a:t> und </a:t>
-            </a:r>
-            <a:r>
-              <a:rPr lang="de-DE" b="1" dirty="0" err="1">
-                <a:latin typeface="Courier New" panose="02070309020205020404" pitchFamily="49" charset="0"/>
-                <a:cs typeface="Courier New" panose="02070309020205020404" pitchFamily="49" charset="0"/>
-              </a:rPr>
-              <a:t>git-gui</a:t>
-            </a:r>
-            <a:endParaRPr lang="de-DE" b="1" dirty="0">
-              <a:latin typeface="Courier New" panose="02070309020205020404" pitchFamily="49" charset="0"/>
-              <a:cs typeface="Courier New" panose="02070309020205020404" pitchFamily="49" charset="0"/>
-            </a:endParaRPr>
-          </a:p>
-          <a:p>
-            <a:r>
-              <a:rPr lang="de-DE"/>
-              <a:t>GitHub.com</a:t>
-            </a:r>
-          </a:p>
-          <a:p>
-            <a:r>
-              <a:rPr lang="de-DE"/>
-              <a:t>Hochladen und Runterladen von Remote-Repositories</a:t>
-            </a:r>
-            <a:endParaRPr lang="de-DE" dirty="0"/>
-          </a:p>
-          <a:p>
-            <a:r>
-              <a:rPr lang="de-DE" dirty="0"/>
-              <a:t>Links und Tutorials</a:t>
-            </a:r>
-          </a:p>
-          <a:p>
-            <a:endParaRPr lang="de-DE" dirty="0"/>
-          </a:p>
-        </p:txBody>
-      </p:sp>
-    </p:spTree>
-    <p:extLst>
-      <p:ext uri="{BB962C8B-B14F-4D97-AF65-F5344CB8AC3E}">
-        <p14:creationId xmlns:p14="http://schemas.microsoft.com/office/powerpoint/2010/main" val="1280278103"/>
-      </p:ext>
-    </p:extLst>
-  </p:cSld>
-  <p:clrMapOvr>
-    <a:masterClrMapping/>
-  </p:clrMapOvr>
-</p:sld>
-</file>
-
-<file path=ppt/slides/slide20.xml><?xml version="1.0" encoding="utf-8"?>
+<file path=ppt/slides/slide21.xml><?xml version="1.0" encoding="utf-8"?>
 <p:sld xmlns:a="http://schemas.openxmlformats.org/drawingml/2006/main" xmlns:r="http://schemas.openxmlformats.org/officeDocument/2006/relationships" xmlns:p="http://schemas.openxmlformats.org/presentationml/2006/main">
   <p:cSld>
     <p:spTree>
@@ -8466,7 +9298,7 @@
 </p:sld>
 </file>
 
-<file path=ppt/slides/slide21.xml><?xml version="1.0" encoding="utf-8"?>
+<file path=ppt/slides/slide22.xml><?xml version="1.0" encoding="utf-8"?>
 <p:sld xmlns:a="http://schemas.openxmlformats.org/drawingml/2006/main" xmlns:r="http://schemas.openxmlformats.org/officeDocument/2006/relationships" xmlns:p="http://schemas.openxmlformats.org/presentationml/2006/main">
   <p:cSld>
     <p:spTree>
@@ -8775,7 +9607,7 @@
 </p:sld>
 </file>
 
-<file path=ppt/slides/slide22.xml><?xml version="1.0" encoding="utf-8"?>
+<file path=ppt/slides/slide23.xml><?xml version="1.0" encoding="utf-8"?>
 <p:sld xmlns:a="http://schemas.openxmlformats.org/drawingml/2006/main" xmlns:r="http://schemas.openxmlformats.org/officeDocument/2006/relationships" xmlns:p="http://schemas.openxmlformats.org/presentationml/2006/main">
   <p:cSld>
     <p:spTree>
@@ -10481,6 +11313,210 @@
 </file>
 
 <file path=ppt/slides/slide6.xml><?xml version="1.0" encoding="utf-8"?>
+<p:sld xmlns:a="http://schemas.openxmlformats.org/drawingml/2006/main" xmlns:r="http://schemas.openxmlformats.org/officeDocument/2006/relationships" xmlns:p="http://schemas.openxmlformats.org/presentationml/2006/main">
+  <p:cSld>
+    <p:spTree>
+      <p:nvGrpSpPr>
+        <p:cNvPr id="1" name=""/>
+        <p:cNvGrpSpPr/>
+        <p:nvPr/>
+      </p:nvGrpSpPr>
+      <p:grpSpPr>
+        <a:xfrm>
+          <a:off x="0" y="0"/>
+          <a:ext cx="0" cy="0"/>
+          <a:chOff x="0" y="0"/>
+          <a:chExt cx="0" cy="0"/>
+        </a:xfrm>
+      </p:grpSpPr>
+      <p:sp>
+        <p:nvSpPr>
+          <p:cNvPr id="2" name="Titel 1">
+            <a:extLst>
+              <a:ext uri="{FF2B5EF4-FFF2-40B4-BE49-F238E27FC236}">
+                <a16:creationId xmlns:a16="http://schemas.microsoft.com/office/drawing/2014/main" id="{DA574856-5998-25D3-496E-F4D582E7D1F2}"/>
+              </a:ext>
+            </a:extLst>
+          </p:cNvPr>
+          <p:cNvSpPr>
+            <a:spLocks noGrp="1"/>
+          </p:cNvSpPr>
+          <p:nvPr>
+            <p:ph type="title"/>
+          </p:nvPr>
+        </p:nvSpPr>
+        <p:spPr/>
+        <p:txBody>
+          <a:bodyPr>
+            <a:normAutofit fontScale="90000"/>
+          </a:bodyPr>
+          <a:lstStyle/>
+          <a:p>
+            <a:r>
+              <a:rPr lang="de-DE" dirty="0"/>
+              <a:t>Kurzüberblick Arbeitsablauf</a:t>
+            </a:r>
+          </a:p>
+        </p:txBody>
+      </p:sp>
+      <p:sp>
+        <p:nvSpPr>
+          <p:cNvPr id="3" name="Inhaltsplatzhalter 2">
+            <a:extLst>
+              <a:ext uri="{FF2B5EF4-FFF2-40B4-BE49-F238E27FC236}">
+                <a16:creationId xmlns:a16="http://schemas.microsoft.com/office/drawing/2014/main" id="{BAD5733A-5E85-DE23-5E38-82B7B3D66FCA}"/>
+              </a:ext>
+            </a:extLst>
+          </p:cNvPr>
+          <p:cNvSpPr>
+            <a:spLocks noGrp="1"/>
+          </p:cNvSpPr>
+          <p:nvPr>
+            <p:ph idx="1"/>
+          </p:nvPr>
+        </p:nvSpPr>
+        <p:spPr/>
+        <p:txBody>
+          <a:bodyPr>
+            <a:normAutofit fontScale="92500"/>
+          </a:bodyPr>
+          <a:lstStyle/>
+          <a:p>
+            <a:pPr marL="0" indent="0">
+              <a:buNone/>
+            </a:pPr>
+            <a:r>
+              <a:rPr lang="de-DE" dirty="0"/>
+              <a:t>1️⃣Arbeitsverzeichnis / Working Directory→ Hier bearbeitest du deine Dateien (z.B. Quellcode).</a:t>
+            </a:r>
+          </a:p>
+          <a:p>
+            <a:pPr marL="0" indent="0">
+              <a:buNone/>
+            </a:pPr>
+            <a:r>
+              <a:rPr lang="de-DE" dirty="0"/>
+              <a:t>2️⃣</a:t>
+            </a:r>
+            <a:r>
+              <a:rPr lang="de-DE" dirty="0" err="1"/>
+              <a:t>Staging</a:t>
+            </a:r>
+            <a:r>
+              <a:rPr lang="de-DE" dirty="0"/>
+              <a:t> Area (</a:t>
+            </a:r>
+            <a:r>
+              <a:rPr lang="de-DE" b="1" dirty="0" err="1">
+                <a:latin typeface="Consolas" panose="020B0609020204030204" pitchFamily="49" charset="0"/>
+              </a:rPr>
+              <a:t>git</a:t>
+            </a:r>
+            <a:r>
+              <a:rPr lang="de-DE" b="1" dirty="0">
+                <a:latin typeface="Consolas" panose="020B0609020204030204" pitchFamily="49" charset="0"/>
+              </a:rPr>
+              <a:t> </a:t>
+            </a:r>
+            <a:r>
+              <a:rPr lang="de-DE" b="1" dirty="0" err="1">
+                <a:latin typeface="Consolas" panose="020B0609020204030204" pitchFamily="49" charset="0"/>
+              </a:rPr>
+              <a:t>add</a:t>
+            </a:r>
+            <a:r>
+              <a:rPr lang="de-DE" dirty="0"/>
+              <a:t>)→ Du sagst </a:t>
+            </a:r>
+            <a:r>
+              <a:rPr lang="de-DE" dirty="0" err="1"/>
+              <a:t>Git</a:t>
+            </a:r>
+            <a:r>
+              <a:rPr lang="de-DE" dirty="0"/>
+              <a:t>, welche Änderungen du speichern willst.</a:t>
+            </a:r>
+          </a:p>
+          <a:p>
+            <a:pPr marL="0" indent="0">
+              <a:buNone/>
+            </a:pPr>
+            <a:r>
+              <a:rPr lang="de-DE" dirty="0"/>
+              <a:t>3️⃣Repository (lokal) (</a:t>
+            </a:r>
+            <a:r>
+              <a:rPr lang="de-DE" b="1" dirty="0" err="1">
+                <a:latin typeface="Consolas" panose="020B0609020204030204" pitchFamily="49" charset="0"/>
+              </a:rPr>
+              <a:t>git</a:t>
+            </a:r>
+            <a:r>
+              <a:rPr lang="de-DE" b="1" dirty="0">
+                <a:latin typeface="Consolas" panose="020B0609020204030204" pitchFamily="49" charset="0"/>
+              </a:rPr>
+              <a:t> </a:t>
+            </a:r>
+            <a:r>
+              <a:rPr lang="de-DE" b="1" dirty="0" err="1">
+                <a:latin typeface="Consolas" panose="020B0609020204030204" pitchFamily="49" charset="0"/>
+              </a:rPr>
+              <a:t>commit</a:t>
+            </a:r>
+            <a:r>
+              <a:rPr lang="de-DE" dirty="0"/>
+              <a:t>)→ Du erstellst einen Snapshot (Version), der gespeichert wird.</a:t>
+            </a:r>
+          </a:p>
+          <a:p>
+            <a:pPr marL="0" indent="0">
+              <a:buNone/>
+            </a:pPr>
+            <a:r>
+              <a:rPr lang="de-DE" dirty="0"/>
+              <a:t>4️⃣</a:t>
+            </a:r>
+            <a:r>
+              <a:rPr lang="de-DE" u="sng" dirty="0"/>
+              <a:t>Optional</a:t>
+            </a:r>
+            <a:r>
+              <a:rPr lang="de-DE" dirty="0"/>
+              <a:t>: Remote Repository (</a:t>
+            </a:r>
+            <a:r>
+              <a:rPr lang="de-DE" b="1" dirty="0" err="1">
+                <a:latin typeface="Consolas" panose="020B0609020204030204" pitchFamily="49" charset="0"/>
+              </a:rPr>
+              <a:t>git</a:t>
+            </a:r>
+            <a:r>
+              <a:rPr lang="de-DE" b="1" dirty="0">
+                <a:latin typeface="Consolas" panose="020B0609020204030204" pitchFamily="49" charset="0"/>
+              </a:rPr>
+              <a:t> push</a:t>
+            </a:r>
+            <a:r>
+              <a:rPr lang="de-DE" dirty="0"/>
+              <a:t>)→ Du schickst deine Änderungen z.B. zu GitHub.com → dort können andere sie abrufen.</a:t>
+            </a:r>
+          </a:p>
+        </p:txBody>
+      </p:sp>
+    </p:spTree>
+    <p:extLst>
+      <p:ext uri="{BB962C8B-B14F-4D97-AF65-F5344CB8AC3E}">
+        <p14:creationId xmlns:p14="http://schemas.microsoft.com/office/powerpoint/2010/main" val="1223161066"/>
+      </p:ext>
+    </p:extLst>
+  </p:cSld>
+  <p:clrMapOvr>
+    <a:masterClrMapping/>
+  </p:clrMapOvr>
+</p:sld>
+</file>
+
+<file path=ppt/slides/slide7.xml><?xml version="1.0" encoding="utf-8"?>
 <p:sld xmlns:a="http://schemas.openxmlformats.org/drawingml/2006/main" xmlns:r="http://schemas.openxmlformats.org/officeDocument/2006/relationships" xmlns:p="http://schemas.openxmlformats.org/presentationml/2006/main">
   <p:cSld>
     <p:spTree>
@@ -11705,7 +12741,7 @@
 </p:sld>
 </file>
 
-<file path=ppt/slides/slide7.xml><?xml version="1.0" encoding="utf-8"?>
+<file path=ppt/slides/slide8.xml><?xml version="1.0" encoding="utf-8"?>
 <p:sld xmlns:a="http://schemas.openxmlformats.org/drawingml/2006/main" xmlns:r="http://schemas.openxmlformats.org/officeDocument/2006/relationships" xmlns:p="http://schemas.openxmlformats.org/presentationml/2006/main">
   <p:cSld>
     <p:spTree>
@@ -12835,7 +13871,7 @@
 </p:sld>
 </file>
 
-<file path=ppt/slides/slide8.xml><?xml version="1.0" encoding="utf-8"?>
+<file path=ppt/slides/slide9.xml><?xml version="1.0" encoding="utf-8"?>
 <p:sld xmlns:a="http://schemas.openxmlformats.org/drawingml/2006/main" xmlns:r="http://schemas.openxmlformats.org/officeDocument/2006/relationships" xmlns:p="http://schemas.openxmlformats.org/presentationml/2006/main">
   <p:cSld>
     <p:spTree>
@@ -12977,614 +14013,6 @@
     <p:extLst>
       <p:ext uri="{BB962C8B-B14F-4D97-AF65-F5344CB8AC3E}">
         <p14:creationId xmlns:p14="http://schemas.microsoft.com/office/powerpoint/2010/main" val="3079755189"/>
-      </p:ext>
-    </p:extLst>
-  </p:cSld>
-  <p:clrMapOvr>
-    <a:masterClrMapping/>
-  </p:clrMapOvr>
-</p:sld>
-</file>
-
-<file path=ppt/slides/slide9.xml><?xml version="1.0" encoding="utf-8"?>
-<p:sld xmlns:a="http://schemas.openxmlformats.org/drawingml/2006/main" xmlns:r="http://schemas.openxmlformats.org/officeDocument/2006/relationships" xmlns:p="http://schemas.openxmlformats.org/presentationml/2006/main">
-  <p:cSld>
-    <p:spTree>
-      <p:nvGrpSpPr>
-        <p:cNvPr id="1" name=""/>
-        <p:cNvGrpSpPr/>
-        <p:nvPr/>
-      </p:nvGrpSpPr>
-      <p:grpSpPr>
-        <a:xfrm>
-          <a:off x="0" y="0"/>
-          <a:ext cx="0" cy="0"/>
-          <a:chOff x="0" y="0"/>
-          <a:chExt cx="0" cy="0"/>
-        </a:xfrm>
-      </p:grpSpPr>
-      <p:sp>
-        <p:nvSpPr>
-          <p:cNvPr id="2" name="Titel 1">
-            <a:extLst>
-              <a:ext uri="{FF2B5EF4-FFF2-40B4-BE49-F238E27FC236}">
-                <a16:creationId xmlns:a16="http://schemas.microsoft.com/office/drawing/2014/main" id="{37E45B4D-8157-57D5-C5D0-F9012EADC956}"/>
-              </a:ext>
-            </a:extLst>
-          </p:cNvPr>
-          <p:cNvSpPr>
-            <a:spLocks noGrp="1"/>
-          </p:cNvSpPr>
-          <p:nvPr>
-            <p:ph type="title"/>
-          </p:nvPr>
-        </p:nvSpPr>
-        <p:spPr>
-          <a:xfrm>
-            <a:off x="457200" y="274638"/>
-            <a:ext cx="7139136" cy="1143000"/>
-          </a:xfrm>
-        </p:spPr>
-        <p:txBody>
-          <a:bodyPr>
-            <a:normAutofit fontScale="90000"/>
-          </a:bodyPr>
-          <a:lstStyle/>
-          <a:p>
-            <a:r>
-              <a:rPr lang="de-DE" dirty="0" err="1"/>
-              <a:t>git</a:t>
-            </a:r>
-            <a:r>
-              <a:rPr lang="de-DE" dirty="0"/>
-              <a:t> </a:t>
-            </a:r>
-            <a:r>
-              <a:rPr lang="de-DE" dirty="0" err="1"/>
-              <a:t>commit</a:t>
-            </a:r>
-            <a:r>
-              <a:rPr lang="de-DE" dirty="0"/>
-              <a:t> / </a:t>
-            </a:r>
-            <a:r>
-              <a:rPr lang="de-DE" dirty="0" err="1"/>
-              <a:t>Commits</a:t>
-            </a:r>
-            <a:r>
-              <a:rPr lang="de-DE" dirty="0"/>
-              <a:t> erstellen, ersetzen und entfernen</a:t>
-            </a:r>
-          </a:p>
-        </p:txBody>
-      </p:sp>
-      <p:sp>
-        <p:nvSpPr>
-          <p:cNvPr id="3" name="Inhaltsplatzhalter 2">
-            <a:extLst>
-              <a:ext uri="{FF2B5EF4-FFF2-40B4-BE49-F238E27FC236}">
-                <a16:creationId xmlns:a16="http://schemas.microsoft.com/office/drawing/2014/main" id="{DCA3FA79-44FA-F478-643B-9165D103535C}"/>
-              </a:ext>
-            </a:extLst>
-          </p:cNvPr>
-          <p:cNvSpPr>
-            <a:spLocks noGrp="1"/>
-          </p:cNvSpPr>
-          <p:nvPr>
-            <p:ph idx="1"/>
-          </p:nvPr>
-        </p:nvSpPr>
-        <p:spPr>
-          <a:xfrm>
-            <a:off x="457200" y="1600200"/>
-            <a:ext cx="8229600" cy="5141168"/>
-          </a:xfrm>
-        </p:spPr>
-        <p:txBody>
-          <a:bodyPr>
-            <a:normAutofit fontScale="62500" lnSpcReduction="20000"/>
-          </a:bodyPr>
-          <a:lstStyle/>
-          <a:p>
-            <a:r>
-              <a:rPr lang="de-DE" sz="2900" b="1" dirty="0" err="1">
-                <a:latin typeface="Courier New" panose="02070309020205020404" pitchFamily="49" charset="0"/>
-                <a:cs typeface="Courier New" panose="02070309020205020404" pitchFamily="49" charset="0"/>
-              </a:rPr>
-              <a:t>git</a:t>
-            </a:r>
-            <a:r>
-              <a:rPr lang="de-DE" sz="2900" b="1" dirty="0">
-                <a:latin typeface="Courier New" panose="02070309020205020404" pitchFamily="49" charset="0"/>
-                <a:cs typeface="Courier New" panose="02070309020205020404" pitchFamily="49" charset="0"/>
-              </a:rPr>
-              <a:t> </a:t>
-            </a:r>
-            <a:r>
-              <a:rPr lang="de-DE" sz="2900" b="1" dirty="0" err="1">
-                <a:latin typeface="Courier New" panose="02070309020205020404" pitchFamily="49" charset="0"/>
-                <a:cs typeface="Courier New" panose="02070309020205020404" pitchFamily="49" charset="0"/>
-              </a:rPr>
-              <a:t>commit</a:t>
-            </a:r>
-            <a:r>
-              <a:rPr lang="de-DE" sz="2900" b="1" dirty="0">
-                <a:latin typeface="Courier New" panose="02070309020205020404" pitchFamily="49" charset="0"/>
-                <a:cs typeface="Courier New" panose="02070309020205020404" pitchFamily="49" charset="0"/>
-              </a:rPr>
-              <a:t> </a:t>
-            </a:r>
-            <a:r>
-              <a:rPr lang="de-DE" dirty="0">
-                <a:sym typeface="Wingdings" panose="05000000000000000000" pitchFamily="2" charset="2"/>
-              </a:rPr>
-              <a:t> </a:t>
-            </a:r>
-            <a:r>
-              <a:rPr lang="de-DE" dirty="0"/>
-              <a:t>Erstellt einen neuen Snapshot (Commit) des Working-Dir im Repository, und zwar nur die Dateien, die vorher mit </a:t>
-            </a:r>
-            <a:r>
-              <a:rPr lang="de-DE" sz="2800" b="1" dirty="0" err="1">
-                <a:latin typeface="Courier New" panose="02070309020205020404" pitchFamily="49" charset="0"/>
-                <a:cs typeface="Courier New" panose="02070309020205020404" pitchFamily="49" charset="0"/>
-              </a:rPr>
-              <a:t>git</a:t>
-            </a:r>
-            <a:r>
-              <a:rPr lang="de-DE" sz="2800" b="1" dirty="0">
-                <a:latin typeface="Courier New" panose="02070309020205020404" pitchFamily="49" charset="0"/>
-                <a:cs typeface="Courier New" panose="02070309020205020404" pitchFamily="49" charset="0"/>
-              </a:rPr>
-              <a:t> </a:t>
-            </a:r>
-            <a:r>
-              <a:rPr lang="de-DE" sz="2800" b="1" dirty="0" err="1">
-                <a:latin typeface="Courier New" panose="02070309020205020404" pitchFamily="49" charset="0"/>
-                <a:cs typeface="Courier New" panose="02070309020205020404" pitchFamily="49" charset="0"/>
-              </a:rPr>
-              <a:t>add</a:t>
-            </a:r>
-            <a:r>
-              <a:rPr lang="de-DE" sz="2800" b="1" dirty="0">
-                <a:latin typeface="Courier New" panose="02070309020205020404" pitchFamily="49" charset="0"/>
-                <a:cs typeface="Courier New" panose="02070309020205020404" pitchFamily="49" charset="0"/>
-              </a:rPr>
-              <a:t> &lt;</a:t>
-            </a:r>
-            <a:r>
-              <a:rPr lang="de-DE" sz="2800" b="1" dirty="0" err="1">
-                <a:latin typeface="Courier New" panose="02070309020205020404" pitchFamily="49" charset="0"/>
-                <a:cs typeface="Courier New" panose="02070309020205020404" pitchFamily="49" charset="0"/>
-              </a:rPr>
-              <a:t>dateien</a:t>
-            </a:r>
-            <a:r>
-              <a:rPr lang="de-DE" sz="2800" b="1" dirty="0">
-                <a:latin typeface="Courier New" panose="02070309020205020404" pitchFamily="49" charset="0"/>
-                <a:cs typeface="Courier New" panose="02070309020205020404" pitchFamily="49" charset="0"/>
-              </a:rPr>
-              <a:t>&gt; </a:t>
-            </a:r>
-            <a:r>
-              <a:rPr lang="de-DE" dirty="0" err="1"/>
-              <a:t>gestaged</a:t>
-            </a:r>
-            <a:r>
-              <a:rPr lang="de-DE" dirty="0"/>
-              <a:t> worden sind. Dabei wird eine Textdatei geöffnet um einen aussagekräftigen Kommentar ("Message") zum Commit zu schreiben</a:t>
-            </a:r>
-          </a:p>
-          <a:p>
-            <a:r>
-              <a:rPr lang="de-DE" sz="2800" b="1" dirty="0" err="1">
-                <a:latin typeface="Courier New" panose="02070309020205020404" pitchFamily="49" charset="0"/>
-                <a:cs typeface="Courier New" panose="02070309020205020404" pitchFamily="49" charset="0"/>
-              </a:rPr>
-              <a:t>git</a:t>
-            </a:r>
-            <a:r>
-              <a:rPr lang="de-DE" sz="2800" b="1" dirty="0">
-                <a:latin typeface="Courier New" panose="02070309020205020404" pitchFamily="49" charset="0"/>
-                <a:cs typeface="Courier New" panose="02070309020205020404" pitchFamily="49" charset="0"/>
-              </a:rPr>
-              <a:t> </a:t>
-            </a:r>
-            <a:r>
-              <a:rPr lang="de-DE" sz="2800" b="1" dirty="0" err="1">
-                <a:latin typeface="Courier New" panose="02070309020205020404" pitchFamily="49" charset="0"/>
-                <a:cs typeface="Courier New" panose="02070309020205020404" pitchFamily="49" charset="0"/>
-              </a:rPr>
-              <a:t>commit</a:t>
-            </a:r>
-            <a:r>
-              <a:rPr lang="de-DE" sz="2800" b="1" dirty="0">
-                <a:latin typeface="Courier New" panose="02070309020205020404" pitchFamily="49" charset="0"/>
-                <a:cs typeface="Courier New" panose="02070309020205020404" pitchFamily="49" charset="0"/>
-              </a:rPr>
-              <a:t> -m "Kommentar" </a:t>
-            </a:r>
-            <a:r>
-              <a:rPr lang="de-DE" dirty="0">
-                <a:sym typeface="Wingdings" panose="05000000000000000000" pitchFamily="2" charset="2"/>
-              </a:rPr>
-              <a:t> mit Kommentar committen, dabei fällt das Öffnen der Textdatei weg</a:t>
-            </a:r>
-          </a:p>
-          <a:p>
-            <a:r>
-              <a:rPr lang="de-DE" sz="2800" b="1" dirty="0" err="1">
-                <a:latin typeface="Courier New" panose="02070309020205020404" pitchFamily="49" charset="0"/>
-                <a:cs typeface="Courier New" panose="02070309020205020404" pitchFamily="49" charset="0"/>
-              </a:rPr>
-              <a:t>git</a:t>
-            </a:r>
-            <a:r>
-              <a:rPr lang="de-DE" sz="2800" b="1" dirty="0">
-                <a:latin typeface="Courier New" panose="02070309020205020404" pitchFamily="49" charset="0"/>
-                <a:cs typeface="Courier New" panose="02070309020205020404" pitchFamily="49" charset="0"/>
-              </a:rPr>
-              <a:t> </a:t>
-            </a:r>
-            <a:r>
-              <a:rPr lang="de-DE" sz="2800" b="1" dirty="0" err="1">
-                <a:latin typeface="Courier New" panose="02070309020205020404" pitchFamily="49" charset="0"/>
-                <a:cs typeface="Courier New" panose="02070309020205020404" pitchFamily="49" charset="0"/>
-              </a:rPr>
-              <a:t>commit</a:t>
-            </a:r>
-            <a:r>
-              <a:rPr lang="de-DE" sz="2800" b="1" dirty="0">
-                <a:latin typeface="Courier New" panose="02070309020205020404" pitchFamily="49" charset="0"/>
-                <a:cs typeface="Courier New" panose="02070309020205020404" pitchFamily="49" charset="0"/>
-              </a:rPr>
-              <a:t> -a -m "Kommentar" </a:t>
-            </a:r>
-            <a:r>
-              <a:rPr lang="de-DE" dirty="0">
-                <a:sym typeface="Wingdings" panose="05000000000000000000" pitchFamily="2" charset="2"/>
-              </a:rPr>
-              <a:t> </a:t>
-            </a:r>
-            <a:r>
-              <a:rPr lang="de-DE" dirty="0" err="1">
-                <a:sym typeface="Wingdings" panose="05000000000000000000" pitchFamily="2" charset="2"/>
-              </a:rPr>
-              <a:t>Committed</a:t>
-            </a:r>
-            <a:r>
-              <a:rPr lang="de-DE" dirty="0">
-                <a:sym typeface="Wingdings" panose="05000000000000000000" pitchFamily="2" charset="2"/>
-              </a:rPr>
-              <a:t> alle Dateien, die seit dem letzten Commit verändert wurden (quasi ein "auto-stage")</a:t>
-            </a:r>
-          </a:p>
-          <a:p>
-            <a:r>
-              <a:rPr lang="de-DE" sz="2800" b="1" dirty="0" err="1">
-                <a:latin typeface="Courier New" panose="02070309020205020404" pitchFamily="49" charset="0"/>
-                <a:cs typeface="Courier New" panose="02070309020205020404" pitchFamily="49" charset="0"/>
-                <a:sym typeface="Wingdings" panose="05000000000000000000" pitchFamily="2" charset="2"/>
-              </a:rPr>
-              <a:t>git</a:t>
-            </a:r>
-            <a:r>
-              <a:rPr lang="de-DE" sz="2800" b="1" dirty="0">
-                <a:latin typeface="Courier New" panose="02070309020205020404" pitchFamily="49" charset="0"/>
-                <a:cs typeface="Courier New" panose="02070309020205020404" pitchFamily="49" charset="0"/>
-                <a:sym typeface="Wingdings" panose="05000000000000000000" pitchFamily="2" charset="2"/>
-              </a:rPr>
-              <a:t> </a:t>
-            </a:r>
-            <a:r>
-              <a:rPr lang="de-DE" sz="2800" b="1" dirty="0" err="1">
-                <a:latin typeface="Courier New" panose="02070309020205020404" pitchFamily="49" charset="0"/>
-                <a:cs typeface="Courier New" panose="02070309020205020404" pitchFamily="49" charset="0"/>
-                <a:sym typeface="Wingdings" panose="05000000000000000000" pitchFamily="2" charset="2"/>
-              </a:rPr>
-              <a:t>commit</a:t>
-            </a:r>
-            <a:r>
-              <a:rPr lang="de-DE" sz="2800" b="1" dirty="0">
-                <a:latin typeface="Courier New" panose="02070309020205020404" pitchFamily="49" charset="0"/>
-                <a:cs typeface="Courier New" panose="02070309020205020404" pitchFamily="49" charset="0"/>
-                <a:sym typeface="Wingdings" panose="05000000000000000000" pitchFamily="2" charset="2"/>
-              </a:rPr>
-              <a:t> --</a:t>
-            </a:r>
-            <a:r>
-              <a:rPr lang="de-DE" sz="2800" b="1" dirty="0" err="1">
-                <a:latin typeface="Courier New" panose="02070309020205020404" pitchFamily="49" charset="0"/>
-                <a:cs typeface="Courier New" panose="02070309020205020404" pitchFamily="49" charset="0"/>
-                <a:sym typeface="Wingdings" panose="05000000000000000000" pitchFamily="2" charset="2"/>
-              </a:rPr>
-              <a:t>amend</a:t>
-            </a:r>
-            <a:r>
-              <a:rPr lang="de-DE" sz="2800" b="1" dirty="0">
-                <a:latin typeface="Courier New" panose="02070309020205020404" pitchFamily="49" charset="0"/>
-                <a:cs typeface="Courier New" panose="02070309020205020404" pitchFamily="49" charset="0"/>
-                <a:sym typeface="Wingdings" panose="05000000000000000000" pitchFamily="2" charset="2"/>
-              </a:rPr>
-              <a:t> -m "Kommentar" </a:t>
-            </a:r>
-            <a:r>
-              <a:rPr lang="de-DE" dirty="0">
-                <a:sym typeface="Wingdings" panose="05000000000000000000" pitchFamily="2" charset="2"/>
-              </a:rPr>
-              <a:t> Ersetzt den letzten Commit ("HEAD") mit einem neuen Commit</a:t>
-            </a:r>
-          </a:p>
-          <a:p>
-            <a:r>
-              <a:rPr lang="de-DE" sz="2900" b="1" dirty="0" err="1">
-                <a:latin typeface="Courier New" panose="02070309020205020404" pitchFamily="49" charset="0"/>
-                <a:cs typeface="Courier New" panose="02070309020205020404" pitchFamily="49" charset="0"/>
-                <a:sym typeface="Wingdings" panose="05000000000000000000" pitchFamily="2" charset="2"/>
-              </a:rPr>
-              <a:t>git</a:t>
-            </a:r>
-            <a:r>
-              <a:rPr lang="de-DE" sz="2900" b="1" dirty="0">
-                <a:latin typeface="Courier New" panose="02070309020205020404" pitchFamily="49" charset="0"/>
-                <a:cs typeface="Courier New" panose="02070309020205020404" pitchFamily="49" charset="0"/>
-                <a:sym typeface="Wingdings" panose="05000000000000000000" pitchFamily="2" charset="2"/>
-              </a:rPr>
-              <a:t> </a:t>
-            </a:r>
-            <a:r>
-              <a:rPr lang="de-DE" sz="2900" b="1" dirty="0" err="1">
-                <a:latin typeface="Courier New" panose="02070309020205020404" pitchFamily="49" charset="0"/>
-                <a:cs typeface="Courier New" panose="02070309020205020404" pitchFamily="49" charset="0"/>
-                <a:sym typeface="Wingdings" panose="05000000000000000000" pitchFamily="2" charset="2"/>
-              </a:rPr>
-              <a:t>reset</a:t>
-            </a:r>
-            <a:r>
-              <a:rPr lang="de-DE" sz="2900" b="1" dirty="0">
-                <a:latin typeface="Courier New" panose="02070309020205020404" pitchFamily="49" charset="0"/>
-                <a:cs typeface="Courier New" panose="02070309020205020404" pitchFamily="49" charset="0"/>
-                <a:sym typeface="Wingdings" panose="05000000000000000000" pitchFamily="2" charset="2"/>
-              </a:rPr>
-              <a:t> --soft HEAD~1 </a:t>
-            </a:r>
-            <a:r>
-              <a:rPr lang="de-DE" dirty="0">
-                <a:sym typeface="Wingdings" panose="05000000000000000000" pitchFamily="2" charset="2"/>
-              </a:rPr>
-              <a:t> Entfernt den aktuellsten Commit (Die Zahl </a:t>
-            </a:r>
-            <a:r>
-              <a:rPr lang="de-DE" sz="3200" b="1" dirty="0">
-                <a:latin typeface="Courier New" panose="02070309020205020404" pitchFamily="49" charset="0"/>
-                <a:cs typeface="Courier New" panose="02070309020205020404" pitchFamily="49" charset="0"/>
-                <a:sym typeface="Wingdings" panose="05000000000000000000" pitchFamily="2" charset="2"/>
-              </a:rPr>
-              <a:t>~1 </a:t>
-            </a:r>
-            <a:r>
-              <a:rPr lang="de-DE" dirty="0">
-                <a:sym typeface="Wingdings" panose="05000000000000000000" pitchFamily="2" charset="2"/>
-              </a:rPr>
-              <a:t>steht für Anzahl der </a:t>
-            </a:r>
-            <a:r>
-              <a:rPr lang="de-DE" dirty="0" err="1">
-                <a:sym typeface="Wingdings" panose="05000000000000000000" pitchFamily="2" charset="2"/>
-              </a:rPr>
-              <a:t>Commits</a:t>
-            </a:r>
-            <a:r>
-              <a:rPr lang="de-DE" dirty="0">
-                <a:sym typeface="Wingdings" panose="05000000000000000000" pitchFamily="2" charset="2"/>
-              </a:rPr>
-              <a:t>, die entfernt werden), das Working-Dir bleibt dabei unverändert.</a:t>
-            </a:r>
-          </a:p>
-          <a:p>
-            <a:r>
-              <a:rPr lang="de-DE" sz="2900" b="1" dirty="0" err="1">
-                <a:latin typeface="Courier New" panose="02070309020205020404" pitchFamily="49" charset="0"/>
-                <a:cs typeface="Courier New" panose="02070309020205020404" pitchFamily="49" charset="0"/>
-              </a:rPr>
-              <a:t>git</a:t>
-            </a:r>
-            <a:r>
-              <a:rPr lang="de-DE" sz="2900" b="1" dirty="0">
-                <a:latin typeface="Courier New" panose="02070309020205020404" pitchFamily="49" charset="0"/>
-                <a:cs typeface="Courier New" panose="02070309020205020404" pitchFamily="49" charset="0"/>
-              </a:rPr>
-              <a:t> </a:t>
-            </a:r>
-            <a:r>
-              <a:rPr lang="de-DE" sz="2900" b="1" dirty="0" err="1">
-                <a:latin typeface="Courier New" panose="02070309020205020404" pitchFamily="49" charset="0"/>
-                <a:cs typeface="Courier New" panose="02070309020205020404" pitchFamily="49" charset="0"/>
-              </a:rPr>
-              <a:t>reset</a:t>
-            </a:r>
-            <a:r>
-              <a:rPr lang="de-DE" sz="2900" b="1" dirty="0">
-                <a:latin typeface="Courier New" panose="02070309020205020404" pitchFamily="49" charset="0"/>
-                <a:cs typeface="Courier New" panose="02070309020205020404" pitchFamily="49" charset="0"/>
-              </a:rPr>
-              <a:t> --</a:t>
-            </a:r>
-            <a:r>
-              <a:rPr lang="de-DE" sz="2900" b="1" dirty="0" err="1">
-                <a:latin typeface="Courier New" panose="02070309020205020404" pitchFamily="49" charset="0"/>
-                <a:cs typeface="Courier New" panose="02070309020205020404" pitchFamily="49" charset="0"/>
-              </a:rPr>
-              <a:t>hard</a:t>
-            </a:r>
-            <a:r>
-              <a:rPr lang="de-DE" sz="2900" b="1" dirty="0">
-                <a:latin typeface="Courier New" panose="02070309020205020404" pitchFamily="49" charset="0"/>
-                <a:cs typeface="Courier New" panose="02070309020205020404" pitchFamily="49" charset="0"/>
-              </a:rPr>
-              <a:t> HEAD~1 </a:t>
-            </a:r>
-            <a:r>
-              <a:rPr lang="de-DE" dirty="0">
-                <a:sym typeface="Wingdings" panose="05000000000000000000" pitchFamily="2" charset="2"/>
-              </a:rPr>
-              <a:t> Entfernt den aktuellsten Commit, und setzt auch das Working-Dir auf den Inhalt des vorigen Commit zurück.</a:t>
-            </a:r>
-            <a:br>
-              <a:rPr lang="de-DE" dirty="0">
-                <a:sym typeface="Wingdings" panose="05000000000000000000" pitchFamily="2" charset="2"/>
-              </a:rPr>
-            </a:br>
-            <a:r>
-              <a:rPr lang="de-DE" dirty="0">
-                <a:sym typeface="Wingdings" panose="05000000000000000000" pitchFamily="2" charset="2"/>
-              </a:rPr>
-              <a:t>(Die Zahl </a:t>
-            </a:r>
-            <a:r>
-              <a:rPr lang="de-DE" sz="3200" b="1" dirty="0">
-                <a:latin typeface="Courier New" panose="02070309020205020404" pitchFamily="49" charset="0"/>
-                <a:cs typeface="Courier New" panose="02070309020205020404" pitchFamily="49" charset="0"/>
-                <a:sym typeface="Wingdings" panose="05000000000000000000" pitchFamily="2" charset="2"/>
-              </a:rPr>
-              <a:t>~1 </a:t>
-            </a:r>
-            <a:r>
-              <a:rPr lang="de-DE" dirty="0">
-                <a:sym typeface="Wingdings" panose="05000000000000000000" pitchFamily="2" charset="2"/>
-              </a:rPr>
-              <a:t>steht für Anzahl der </a:t>
-            </a:r>
-            <a:r>
-              <a:rPr lang="de-DE" dirty="0" err="1">
-                <a:sym typeface="Wingdings" panose="05000000000000000000" pitchFamily="2" charset="2"/>
-              </a:rPr>
-              <a:t>Commits</a:t>
-            </a:r>
-            <a:r>
-              <a:rPr lang="de-DE" dirty="0">
-                <a:sym typeface="Wingdings" panose="05000000000000000000" pitchFamily="2" charset="2"/>
-              </a:rPr>
-              <a:t>, die entfernt werden)</a:t>
-            </a:r>
-          </a:p>
-          <a:p>
-            <a:r>
-              <a:rPr lang="de-DE" sz="2900" b="1" dirty="0" err="1">
-                <a:latin typeface="Courier New" panose="02070309020205020404" pitchFamily="49" charset="0"/>
-                <a:cs typeface="Courier New" panose="02070309020205020404" pitchFamily="49" charset="0"/>
-                <a:sym typeface="Wingdings" panose="05000000000000000000" pitchFamily="2" charset="2"/>
-              </a:rPr>
-              <a:t>git</a:t>
-            </a:r>
-            <a:r>
-              <a:rPr lang="de-DE" sz="2900" b="1" dirty="0">
-                <a:latin typeface="Courier New" panose="02070309020205020404" pitchFamily="49" charset="0"/>
-                <a:cs typeface="Courier New" panose="02070309020205020404" pitchFamily="49" charset="0"/>
-                <a:sym typeface="Wingdings" panose="05000000000000000000" pitchFamily="2" charset="2"/>
-              </a:rPr>
-              <a:t> </a:t>
-            </a:r>
-            <a:r>
-              <a:rPr lang="de-DE" sz="2900" b="1" dirty="0" err="1">
-                <a:latin typeface="Courier New" panose="02070309020205020404" pitchFamily="49" charset="0"/>
-                <a:cs typeface="Courier New" panose="02070309020205020404" pitchFamily="49" charset="0"/>
-                <a:sym typeface="Wingdings" panose="05000000000000000000" pitchFamily="2" charset="2"/>
-              </a:rPr>
-              <a:t>checkout</a:t>
-            </a:r>
-            <a:r>
-              <a:rPr lang="de-DE" sz="2900" b="1" dirty="0">
-                <a:latin typeface="Courier New" panose="02070309020205020404" pitchFamily="49" charset="0"/>
-                <a:cs typeface="Courier New" panose="02070309020205020404" pitchFamily="49" charset="0"/>
-                <a:sym typeface="Wingdings" panose="05000000000000000000" pitchFamily="2" charset="2"/>
-              </a:rPr>
-              <a:t> &lt;</a:t>
-            </a:r>
-            <a:r>
-              <a:rPr lang="de-DE" sz="2900" b="1" dirty="0" err="1">
-                <a:latin typeface="Courier New" panose="02070309020205020404" pitchFamily="49" charset="0"/>
-                <a:cs typeface="Courier New" panose="02070309020205020404" pitchFamily="49" charset="0"/>
-                <a:sym typeface="Wingdings" panose="05000000000000000000" pitchFamily="2" charset="2"/>
-              </a:rPr>
-              <a:t>commit</a:t>
-            </a:r>
-            <a:r>
-              <a:rPr lang="de-DE" sz="2900" b="1" dirty="0">
-                <a:latin typeface="Courier New" panose="02070309020205020404" pitchFamily="49" charset="0"/>
-                <a:cs typeface="Courier New" panose="02070309020205020404" pitchFamily="49" charset="0"/>
-                <a:sym typeface="Wingdings" panose="05000000000000000000" pitchFamily="2" charset="2"/>
-              </a:rPr>
-              <a:t>&gt; &lt;</a:t>
-            </a:r>
-            <a:r>
-              <a:rPr lang="de-DE" sz="2900" b="1" dirty="0" err="1">
-                <a:latin typeface="Courier New" panose="02070309020205020404" pitchFamily="49" charset="0"/>
-                <a:cs typeface="Courier New" panose="02070309020205020404" pitchFamily="49" charset="0"/>
-                <a:sym typeface="Wingdings" panose="05000000000000000000" pitchFamily="2" charset="2"/>
-              </a:rPr>
-              <a:t>dateiname</a:t>
-            </a:r>
-            <a:r>
-              <a:rPr lang="de-DE" sz="2900" b="1" dirty="0">
-                <a:latin typeface="Courier New" panose="02070309020205020404" pitchFamily="49" charset="0"/>
-                <a:cs typeface="Courier New" panose="02070309020205020404" pitchFamily="49" charset="0"/>
-                <a:sym typeface="Wingdings" panose="05000000000000000000" pitchFamily="2" charset="2"/>
-              </a:rPr>
-              <a:t>&gt; </a:t>
-            </a:r>
-            <a:r>
-              <a:rPr lang="de-DE" dirty="0">
-                <a:sym typeface="Wingdings" panose="05000000000000000000" pitchFamily="2" charset="2"/>
-              </a:rPr>
-              <a:t> Wiederherstellung eines bestimmten Commit ins Working-Dir, z.B. </a:t>
-            </a:r>
-            <a:r>
-              <a:rPr lang="de-DE" sz="2900" b="1" dirty="0" err="1">
-                <a:latin typeface="Courier New" panose="02070309020205020404" pitchFamily="49" charset="0"/>
-                <a:cs typeface="Courier New" panose="02070309020205020404" pitchFamily="49" charset="0"/>
-                <a:sym typeface="Wingdings" panose="05000000000000000000" pitchFamily="2" charset="2"/>
-              </a:rPr>
-              <a:t>git</a:t>
-            </a:r>
-            <a:r>
-              <a:rPr lang="de-DE" sz="2900" b="1" dirty="0">
-                <a:latin typeface="Courier New" panose="02070309020205020404" pitchFamily="49" charset="0"/>
-                <a:cs typeface="Courier New" panose="02070309020205020404" pitchFamily="49" charset="0"/>
-                <a:sym typeface="Wingdings" panose="05000000000000000000" pitchFamily="2" charset="2"/>
-              </a:rPr>
-              <a:t> </a:t>
-            </a:r>
-            <a:r>
-              <a:rPr lang="de-DE" sz="2900" b="1" dirty="0" err="1">
-                <a:latin typeface="Courier New" panose="02070309020205020404" pitchFamily="49" charset="0"/>
-                <a:cs typeface="Courier New" panose="02070309020205020404" pitchFamily="49" charset="0"/>
-                <a:sym typeface="Wingdings" panose="05000000000000000000" pitchFamily="2" charset="2"/>
-              </a:rPr>
-              <a:t>checkout</a:t>
-            </a:r>
-            <a:r>
-              <a:rPr lang="de-DE" sz="2900" b="1" dirty="0">
-                <a:latin typeface="Courier New" panose="02070309020205020404" pitchFamily="49" charset="0"/>
-                <a:cs typeface="Courier New" panose="02070309020205020404" pitchFamily="49" charset="0"/>
-                <a:sym typeface="Wingdings" panose="05000000000000000000" pitchFamily="2" charset="2"/>
-              </a:rPr>
-              <a:t> HEAD~1 *.*</a:t>
-            </a:r>
-            <a:r>
-              <a:rPr lang="de-DE" sz="3300" dirty="0">
-                <a:sym typeface="Wingdings" panose="05000000000000000000" pitchFamily="2" charset="2"/>
-              </a:rPr>
-              <a:t>, siehe folgende Folie!</a:t>
-            </a:r>
-            <a:endParaRPr lang="de-DE" sz="3300" dirty="0"/>
-          </a:p>
-        </p:txBody>
-      </p:sp>
-    </p:spTree>
-    <p:extLst>
-      <p:ext uri="{BB962C8B-B14F-4D97-AF65-F5344CB8AC3E}">
-        <p14:creationId xmlns:p14="http://schemas.microsoft.com/office/powerpoint/2010/main" val="1723275432"/>
       </p:ext>
     </p:extLst>
   </p:cSld>

--- a/Git.pptx
+++ b/Git.pptx
@@ -230,7 +230,7 @@
           <a:p>
             <a:fld id="{53FDF33E-3C65-4C97-B984-5E296FC62525}" type="datetimeFigureOut">
               <a:rPr lang="de-DE" smtClean="0"/>
-              <a:t>07.06.2025</a:t>
+              <a:t>16.06.2025</a:t>
             </a:fld>
             <a:endParaRPr lang="de-DE"/>
           </a:p>
@@ -760,7 +760,7 @@
           <a:p>
             <a:fld id="{94818ED8-3753-490C-B819-473C9754FE47}" type="datetimeFigureOut">
               <a:rPr lang="de-DE" smtClean="0"/>
-              <a:t>07.06.2025</a:t>
+              <a:t>16.06.2025</a:t>
             </a:fld>
             <a:endParaRPr lang="de-DE"/>
           </a:p>
@@ -928,7 +928,7 @@
           <a:p>
             <a:fld id="{94818ED8-3753-490C-B819-473C9754FE47}" type="datetimeFigureOut">
               <a:rPr lang="de-DE" smtClean="0"/>
-              <a:t>07.06.2025</a:t>
+              <a:t>16.06.2025</a:t>
             </a:fld>
             <a:endParaRPr lang="de-DE"/>
           </a:p>
@@ -1106,7 +1106,7 @@
           <a:p>
             <a:fld id="{94818ED8-3753-490C-B819-473C9754FE47}" type="datetimeFigureOut">
               <a:rPr lang="de-DE" smtClean="0"/>
-              <a:t>07.06.2025</a:t>
+              <a:t>16.06.2025</a:t>
             </a:fld>
             <a:endParaRPr lang="de-DE"/>
           </a:p>
@@ -1289,7 +1289,7 @@
           <a:p>
             <a:fld id="{94818ED8-3753-490C-B819-473C9754FE47}" type="datetimeFigureOut">
               <a:rPr lang="de-DE" smtClean="0"/>
-              <a:t>07.06.2025</a:t>
+              <a:t>16.06.2025</a:t>
             </a:fld>
             <a:endParaRPr lang="de-DE"/>
           </a:p>
@@ -1575,7 +1575,7 @@
           <a:p>
             <a:fld id="{94818ED8-3753-490C-B819-473C9754FE47}" type="datetimeFigureOut">
               <a:rPr lang="de-DE" smtClean="0"/>
-              <a:t>07.06.2025</a:t>
+              <a:t>16.06.2025</a:t>
             </a:fld>
             <a:endParaRPr lang="de-DE"/>
           </a:p>
@@ -1860,7 +1860,7 @@
           <a:p>
             <a:fld id="{94818ED8-3753-490C-B819-473C9754FE47}" type="datetimeFigureOut">
               <a:rPr lang="de-DE" smtClean="0"/>
-              <a:t>07.06.2025</a:t>
+              <a:t>16.06.2025</a:t>
             </a:fld>
             <a:endParaRPr lang="de-DE"/>
           </a:p>
@@ -2279,7 +2279,7 @@
           <a:p>
             <a:fld id="{94818ED8-3753-490C-B819-473C9754FE47}" type="datetimeFigureOut">
               <a:rPr lang="de-DE" smtClean="0"/>
-              <a:t>07.06.2025</a:t>
+              <a:t>16.06.2025</a:t>
             </a:fld>
             <a:endParaRPr lang="de-DE"/>
           </a:p>
@@ -2396,7 +2396,7 @@
           <a:p>
             <a:fld id="{94818ED8-3753-490C-B819-473C9754FE47}" type="datetimeFigureOut">
               <a:rPr lang="de-DE" smtClean="0"/>
-              <a:t>07.06.2025</a:t>
+              <a:t>16.06.2025</a:t>
             </a:fld>
             <a:endParaRPr lang="de-DE"/>
           </a:p>
@@ -2491,7 +2491,7 @@
           <a:p>
             <a:fld id="{94818ED8-3753-490C-B819-473C9754FE47}" type="datetimeFigureOut">
               <a:rPr lang="de-DE" smtClean="0"/>
-              <a:t>07.06.2025</a:t>
+              <a:t>16.06.2025</a:t>
             </a:fld>
             <a:endParaRPr lang="de-DE"/>
           </a:p>
@@ -2766,7 +2766,7 @@
           <a:p>
             <a:fld id="{94818ED8-3753-490C-B819-473C9754FE47}" type="datetimeFigureOut">
               <a:rPr lang="de-DE" smtClean="0"/>
-              <a:t>07.06.2025</a:t>
+              <a:t>16.06.2025</a:t>
             </a:fld>
             <a:endParaRPr lang="de-DE"/>
           </a:p>
@@ -3018,7 +3018,7 @@
           <a:p>
             <a:fld id="{94818ED8-3753-490C-B819-473C9754FE47}" type="datetimeFigureOut">
               <a:rPr lang="de-DE" smtClean="0"/>
-              <a:t>07.06.2025</a:t>
+              <a:t>16.06.2025</a:t>
             </a:fld>
             <a:endParaRPr lang="de-DE"/>
           </a:p>
@@ -3229,7 +3229,7 @@
           <a:p>
             <a:fld id="{94818ED8-3753-490C-B819-473C9754FE47}" type="datetimeFigureOut">
               <a:rPr lang="de-DE" smtClean="0"/>
-              <a:t>07.06.2025</a:t>
+              <a:t>16.06.2025</a:t>
             </a:fld>
             <a:endParaRPr lang="de-DE"/>
           </a:p>
@@ -10046,15 +10046,7 @@
             </a:r>
             <a:r>
               <a:rPr lang="de-DE" dirty="0"/>
-              <a:t> ist auch in einigen Entwicklungsumgebungen integriert (</a:t>
-            </a:r>
-            <a:r>
-              <a:rPr lang="de-DE" dirty="0" err="1"/>
-              <a:t>Xcode</a:t>
-            </a:r>
-            <a:r>
-              <a:rPr lang="de-DE" dirty="0"/>
-              <a:t>, VS)</a:t>
+              <a:t> wird auch in den meisten Entwicklungsumgebungen unterstützt</a:t>
             </a:r>
           </a:p>
           <a:p>
@@ -10158,7 +10150,15 @@
             </a:r>
             <a:r>
               <a:rPr lang="de-DE" dirty="0"/>
-              <a:t>: SVN (</a:t>
+              <a:t>: </a:t>
+            </a:r>
+            <a:r>
+              <a:rPr lang="de-DE" b="1" dirty="0" err="1"/>
+              <a:t>svn</a:t>
+            </a:r>
+            <a:r>
+              <a:rPr lang="de-DE" dirty="0"/>
+              <a:t> (</a:t>
             </a:r>
             <a:r>
               <a:rPr lang="de-DE" dirty="0" err="1"/>
@@ -10177,7 +10177,7 @@
               <a:t> (</a:t>
             </a:r>
             <a:r>
-              <a:rPr lang="de-DE" dirty="0" err="1"/>
+              <a:rPr lang="de-DE" b="1" dirty="0" err="1"/>
               <a:t>hg</a:t>
             </a:r>
             <a:r>
@@ -11378,7 +11378,7 @@
         <p:spPr/>
         <p:txBody>
           <a:bodyPr>
-            <a:normAutofit fontScale="92500"/>
+            <a:normAutofit fontScale="92500" lnSpcReduction="10000"/>
           </a:bodyPr>
           <a:lstStyle/>
           <a:p>
@@ -11387,7 +11387,35 @@
             </a:pPr>
             <a:r>
               <a:rPr lang="de-DE" dirty="0"/>
-              <a:t>1️⃣Arbeitsverzeichnis / Working Directory→ Hier bearbeitest du deine Dateien (z.B. Quellcode).</a:t>
+              <a:t>1️⃣Arbeitsverzeichnis / Working Directory einmalig mit </a:t>
+            </a:r>
+            <a:r>
+              <a:rPr lang="de-DE" b="1" dirty="0" err="1">
+                <a:latin typeface="Consolas" panose="020B0609020204030204" pitchFamily="49" charset="0"/>
+              </a:rPr>
+              <a:t>git</a:t>
+            </a:r>
+            <a:r>
+              <a:rPr lang="de-DE" b="1" dirty="0">
+                <a:latin typeface="Consolas" panose="020B0609020204030204" pitchFamily="49" charset="0"/>
+              </a:rPr>
+              <a:t> </a:t>
+            </a:r>
+            <a:r>
+              <a:rPr lang="de-DE" b="1" dirty="0" err="1">
+                <a:latin typeface="Consolas" panose="020B0609020204030204" pitchFamily="49" charset="0"/>
+              </a:rPr>
+              <a:t>init</a:t>
+            </a:r>
+            <a:r>
+              <a:rPr lang="de-DE" b="1" dirty="0">
+                <a:latin typeface="Consolas" panose="020B0609020204030204" pitchFamily="49" charset="0"/>
+              </a:rPr>
+              <a:t> </a:t>
+            </a:r>
+            <a:r>
+              <a:rPr lang="de-DE" dirty="0"/>
+              <a:t>erzeugen → Hier bearbeitest du deine Dateien (z.B. Quellcode).</a:t>
             </a:r>
           </a:p>
           <a:p>
@@ -11434,7 +11462,15 @@
             </a:r>
             <a:r>
               <a:rPr lang="de-DE" dirty="0"/>
-              <a:t>, welche Änderungen du speichern willst.</a:t>
+              <a:t>, welche Änderungen du in </a:t>
+            </a:r>
+            <a:r>
+              <a:rPr lang="de-DE" dirty="0" err="1"/>
+              <a:t>Git</a:t>
+            </a:r>
+            <a:r>
+              <a:rPr lang="de-DE" dirty="0"/>
+              <a:t> speichern/archivieren willst.</a:t>
             </a:r>
           </a:p>
           <a:p>
@@ -11806,19 +11842,37 @@
           <a:p>
             <a:pPr algn="ctr"/>
             <a:r>
-              <a:rPr lang="de-DE"/>
+              <a:rPr lang="de-DE" dirty="0"/>
               <a:t>Repository anlegen mit</a:t>
             </a:r>
             <a:br>
-              <a:rPr lang="de-DE"/>
+              <a:rPr lang="de-DE" dirty="0"/>
             </a:br>
             <a:r>
-              <a:rPr lang="de-DE" b="1">
-                <a:latin typeface="Courier New" panose="02070309020205020404" pitchFamily="49" charset="0"/>
-                <a:cs typeface="Courier New" panose="02070309020205020404" pitchFamily="49" charset="0"/>
-              </a:rPr>
-              <a:t>git init</a:t>
-            </a:r>
+              <a:rPr lang="de-DE" b="1" dirty="0" err="1">
+                <a:latin typeface="Courier New" panose="02070309020205020404" pitchFamily="49" charset="0"/>
+                <a:cs typeface="Courier New" panose="02070309020205020404" pitchFamily="49" charset="0"/>
+              </a:rPr>
+              <a:t>git</a:t>
+            </a:r>
+            <a:r>
+              <a:rPr lang="de-DE" b="1" dirty="0">
+                <a:latin typeface="Courier New" panose="02070309020205020404" pitchFamily="49" charset="0"/>
+                <a:cs typeface="Courier New" panose="02070309020205020404" pitchFamily="49" charset="0"/>
+              </a:rPr>
+              <a:t> </a:t>
+            </a:r>
+            <a:r>
+              <a:rPr lang="de-DE" b="1" dirty="0" err="1">
+                <a:latin typeface="Courier New" panose="02070309020205020404" pitchFamily="49" charset="0"/>
+                <a:cs typeface="Courier New" panose="02070309020205020404" pitchFamily="49" charset="0"/>
+              </a:rPr>
+              <a:t>init</a:t>
+            </a:r>
+            <a:endParaRPr lang="de-DE" b="1" dirty="0">
+              <a:latin typeface="Courier New" panose="02070309020205020404" pitchFamily="49" charset="0"/>
+              <a:cs typeface="Courier New" panose="02070309020205020404" pitchFamily="49" charset="0"/>
+            </a:endParaRPr>
           </a:p>
         </p:txBody>
       </p:sp>
@@ -12768,7 +12822,12 @@
             <p:ph type="title"/>
           </p:nvPr>
         </p:nvSpPr>
-        <p:spPr/>
+        <p:spPr>
+          <a:xfrm>
+            <a:off x="395536" y="44624"/>
+            <a:ext cx="6491064" cy="1143000"/>
+          </a:xfrm>
+        </p:spPr>
         <p:txBody>
           <a:bodyPr/>
           <a:lstStyle/>
@@ -13279,7 +13338,7 @@
               <a:rPr lang="de-DE" sz="1600" dirty="0">
                 <a:sym typeface="Wingdings" panose="05000000000000000000" pitchFamily="2" charset="2"/>
               </a:rPr>
-              <a:t> und der Hashwerte</a:t>
+              <a:t> und der Commit-Hashwerte (wichtig!)</a:t>
             </a:r>
           </a:p>
           <a:p>

--- a/Git.pptx
+++ b/Git.pptx
@@ -230,7 +230,7 @@
           <a:p>
             <a:fld id="{53FDF33E-3C65-4C97-B984-5E296FC62525}" type="datetimeFigureOut">
               <a:rPr lang="de-DE" smtClean="0"/>
-              <a:t>16.06.2025</a:t>
+              <a:t>07.07.2026</a:t>
             </a:fld>
             <a:endParaRPr lang="de-DE"/>
           </a:p>
@@ -760,7 +760,7 @@
           <a:p>
             <a:fld id="{94818ED8-3753-490C-B819-473C9754FE47}" type="datetimeFigureOut">
               <a:rPr lang="de-DE" smtClean="0"/>
-              <a:t>16.06.2025</a:t>
+              <a:t>07.07.2026</a:t>
             </a:fld>
             <a:endParaRPr lang="de-DE"/>
           </a:p>
@@ -928,7 +928,7 @@
           <a:p>
             <a:fld id="{94818ED8-3753-490C-B819-473C9754FE47}" type="datetimeFigureOut">
               <a:rPr lang="de-DE" smtClean="0"/>
-              <a:t>16.06.2025</a:t>
+              <a:t>07.07.2026</a:t>
             </a:fld>
             <a:endParaRPr lang="de-DE"/>
           </a:p>
@@ -1106,7 +1106,7 @@
           <a:p>
             <a:fld id="{94818ED8-3753-490C-B819-473C9754FE47}" type="datetimeFigureOut">
               <a:rPr lang="de-DE" smtClean="0"/>
-              <a:t>16.06.2025</a:t>
+              <a:t>07.07.2026</a:t>
             </a:fld>
             <a:endParaRPr lang="de-DE"/>
           </a:p>
@@ -1289,7 +1289,7 @@
           <a:p>
             <a:fld id="{94818ED8-3753-490C-B819-473C9754FE47}" type="datetimeFigureOut">
               <a:rPr lang="de-DE" smtClean="0"/>
-              <a:t>16.06.2025</a:t>
+              <a:t>07.07.2026</a:t>
             </a:fld>
             <a:endParaRPr lang="de-DE"/>
           </a:p>
@@ -1575,7 +1575,7 @@
           <a:p>
             <a:fld id="{94818ED8-3753-490C-B819-473C9754FE47}" type="datetimeFigureOut">
               <a:rPr lang="de-DE" smtClean="0"/>
-              <a:t>16.06.2025</a:t>
+              <a:t>07.07.2026</a:t>
             </a:fld>
             <a:endParaRPr lang="de-DE"/>
           </a:p>
@@ -1860,7 +1860,7 @@
           <a:p>
             <a:fld id="{94818ED8-3753-490C-B819-473C9754FE47}" type="datetimeFigureOut">
               <a:rPr lang="de-DE" smtClean="0"/>
-              <a:t>16.06.2025</a:t>
+              <a:t>07.07.2026</a:t>
             </a:fld>
             <a:endParaRPr lang="de-DE"/>
           </a:p>
@@ -2279,7 +2279,7 @@
           <a:p>
             <a:fld id="{94818ED8-3753-490C-B819-473C9754FE47}" type="datetimeFigureOut">
               <a:rPr lang="de-DE" smtClean="0"/>
-              <a:t>16.06.2025</a:t>
+              <a:t>07.07.2026</a:t>
             </a:fld>
             <a:endParaRPr lang="de-DE"/>
           </a:p>
@@ -2396,7 +2396,7 @@
           <a:p>
             <a:fld id="{94818ED8-3753-490C-B819-473C9754FE47}" type="datetimeFigureOut">
               <a:rPr lang="de-DE" smtClean="0"/>
-              <a:t>16.06.2025</a:t>
+              <a:t>07.07.2026</a:t>
             </a:fld>
             <a:endParaRPr lang="de-DE"/>
           </a:p>
@@ -2491,7 +2491,7 @@
           <a:p>
             <a:fld id="{94818ED8-3753-490C-B819-473C9754FE47}" type="datetimeFigureOut">
               <a:rPr lang="de-DE" smtClean="0"/>
-              <a:t>16.06.2025</a:t>
+              <a:t>07.07.2026</a:t>
             </a:fld>
             <a:endParaRPr lang="de-DE"/>
           </a:p>
@@ -2766,7 +2766,7 @@
           <a:p>
             <a:fld id="{94818ED8-3753-490C-B819-473C9754FE47}" type="datetimeFigureOut">
               <a:rPr lang="de-DE" smtClean="0"/>
-              <a:t>16.06.2025</a:t>
+              <a:t>07.07.2026</a:t>
             </a:fld>
             <a:endParaRPr lang="de-DE"/>
           </a:p>
@@ -3018,7 +3018,7 @@
           <a:p>
             <a:fld id="{94818ED8-3753-490C-B819-473C9754FE47}" type="datetimeFigureOut">
               <a:rPr lang="de-DE" smtClean="0"/>
-              <a:t>16.06.2025</a:t>
+              <a:t>07.07.2026</a:t>
             </a:fld>
             <a:endParaRPr lang="de-DE"/>
           </a:p>
@@ -3229,7 +3229,7 @@
           <a:p>
             <a:fld id="{94818ED8-3753-490C-B819-473C9754FE47}" type="datetimeFigureOut">
               <a:rPr lang="de-DE" smtClean="0"/>
-              <a:t>16.06.2025</a:t>
+              <a:t>07.07.2026</a:t>
             </a:fld>
             <a:endParaRPr lang="de-DE"/>
           </a:p>
@@ -5682,7 +5682,7 @@
         <p:spPr>
           <a:xfrm>
             <a:off x="186604" y="116632"/>
-            <a:ext cx="6491064" cy="1143000"/>
+            <a:ext cx="6491064" cy="864096"/>
           </a:xfrm>
         </p:spPr>
         <p:txBody>
@@ -5723,8 +5723,8 @@
         </p:nvSpPr>
         <p:spPr>
           <a:xfrm>
-            <a:off x="47826" y="1196752"/>
-            <a:ext cx="6900438" cy="5661248"/>
+            <a:off x="47826" y="980728"/>
+            <a:ext cx="6900438" cy="5877272"/>
           </a:xfrm>
         </p:spPr>
         <p:txBody>
@@ -6721,7 +6721,12 @@
             <p:ph type="title"/>
           </p:nvPr>
         </p:nvSpPr>
-        <p:spPr/>
+        <p:spPr>
+          <a:xfrm>
+            <a:off x="457200" y="274638"/>
+            <a:ext cx="6491064" cy="778098"/>
+          </a:xfrm>
+        </p:spPr>
         <p:txBody>
           <a:bodyPr/>
           <a:lstStyle/>
@@ -8385,13 +8390,13 @@
         </p:nvSpPr>
         <p:spPr>
           <a:xfrm>
-            <a:off x="457200" y="1268760"/>
-            <a:ext cx="5194920" cy="5472608"/>
+            <a:off x="0" y="1268760"/>
+            <a:ext cx="5652120" cy="5472608"/>
           </a:xfrm>
         </p:spPr>
         <p:txBody>
           <a:bodyPr>
-            <a:normAutofit fontScale="85000" lnSpcReduction="10000"/>
+            <a:normAutofit fontScale="92500" lnSpcReduction="20000"/>
           </a:bodyPr>
           <a:lstStyle/>
           <a:p>
@@ -8421,13 +8426,8 @@
             </a:r>
             <a:r>
               <a:rPr lang="de-DE" dirty="0"/>
-              <a:t>bringt aber eine bessere Darstellung und mehr Komfort (</a:t>
-            </a:r>
-            <a:r>
-              <a:rPr lang="de-DE"/>
-              <a:t>sehr empfohlen!)</a:t>
-            </a:r>
-            <a:endParaRPr lang="de-DE" dirty="0"/>
+              <a:t>bringt aber eine bessere Darstellung und mehr Komfort (sehr empfohlen!)</a:t>
+            </a:r>
           </a:p>
           <a:p>
             <a:r>
@@ -8829,15 +8829,7 @@
           <a:p>
             <a:r>
               <a:rPr lang="de-DE" sz="2400" dirty="0"/>
-              <a:t>Nach Eingeben der Message im Eingabefeld kann durch </a:t>
-            </a:r>
-            <a:r>
-              <a:rPr lang="de-DE" sz="2400" dirty="0" err="1"/>
-              <a:t>klcken</a:t>
-            </a:r>
-            <a:r>
-              <a:rPr lang="de-DE" sz="2400" dirty="0"/>
-              <a:t> auf Commit (entspricht </a:t>
+              <a:t>Nach Eingeben der Message im Eingabefeld kann durch klicken auf Commit (entspricht </a:t>
             </a:r>
             <a:r>
               <a:rPr lang="de-DE" sz="2400" b="1" dirty="0" err="1"/>
@@ -8923,60 +8915,6 @@
               <a:rPr lang="de-DE" sz="2400" dirty="0"/>
               <a:t>)</a:t>
             </a:r>
-          </a:p>
-        </p:txBody>
-      </p:sp>
-      <p:sp>
-        <p:nvSpPr>
-          <p:cNvPr id="12" name="Rechteck: abgerundete Ecken 11">
-            <a:extLst>
-              <a:ext uri="{FF2B5EF4-FFF2-40B4-BE49-F238E27FC236}">
-                <a16:creationId xmlns:a16="http://schemas.microsoft.com/office/drawing/2014/main" id="{83336D23-70A4-50C4-D259-9CD956121BC9}"/>
-              </a:ext>
-            </a:extLst>
-          </p:cNvPr>
-          <p:cNvSpPr/>
-          <p:nvPr/>
-        </p:nvSpPr>
-        <p:spPr>
-          <a:xfrm>
-            <a:off x="7378940" y="220434"/>
-            <a:ext cx="1062372" cy="432048"/>
-          </a:xfrm>
-          <a:prstGeom prst="roundRect">
-            <a:avLst/>
-          </a:prstGeom>
-          <a:noFill/>
-          <a:ln w="28575" cap="flat" cmpd="sng" algn="ctr">
-            <a:solidFill>
-              <a:schemeClr val="accent6"/>
-            </a:solidFill>
-            <a:prstDash val="solid"/>
-            <a:round/>
-            <a:headEnd type="none" w="med" len="med"/>
-            <a:tailEnd type="none" w="med" len="med"/>
-          </a:ln>
-        </p:spPr>
-        <p:style>
-          <a:lnRef idx="0">
-            <a:scrgbClr r="0" g="0" b="0"/>
-          </a:lnRef>
-          <a:fillRef idx="0">
-            <a:scrgbClr r="0" g="0" b="0"/>
-          </a:fillRef>
-          <a:effectRef idx="0">
-            <a:scrgbClr r="0" g="0" b="0"/>
-          </a:effectRef>
-          <a:fontRef idx="minor">
-            <a:schemeClr val="accent6"/>
-          </a:fontRef>
-        </p:style>
-        <p:txBody>
-          <a:bodyPr rtlCol="0" anchor="ctr"/>
-          <a:lstStyle/>
-          <a:p>
-            <a:pPr algn="ctr"/>
-            <a:endParaRPr lang="de-DE"/>
           </a:p>
         </p:txBody>
       </p:sp>
@@ -10404,7 +10342,7 @@
         </p:spPr>
         <p:txBody>
           <a:bodyPr>
-            <a:normAutofit fontScale="92500"/>
+            <a:normAutofit fontScale="92500" lnSpcReduction="10000"/>
           </a:bodyPr>
           <a:lstStyle/>
           <a:p>
@@ -10433,7 +10371,7 @@
               <a:t>: </a:t>
             </a:r>
             <a:r>
-              <a:rPr lang="de-DE" dirty="0" err="1"/>
+              <a:rPr lang="de-DE" b="1" dirty="0" err="1"/>
               <a:t>Xcode</a:t>
             </a:r>
             <a:r>
@@ -10544,7 +10482,7 @@
                 <a:latin typeface="Courier New" panose="02070309020205020404" pitchFamily="49" charset="0"/>
                 <a:cs typeface="Courier New" panose="02070309020205020404" pitchFamily="49" charset="0"/>
               </a:rPr>
-              <a:t>apt-get</a:t>
+              <a:t>apt</a:t>
             </a:r>
             <a:r>
               <a:rPr lang="de-DE" sz="3000" b="1" dirty="0">
@@ -10702,7 +10640,77 @@
                 <a:latin typeface="Courier New" panose="02070309020205020404" pitchFamily="49" charset="0"/>
                 <a:cs typeface="Courier New" panose="02070309020205020404" pitchFamily="49" charset="0"/>
               </a:rPr>
-              <a:t> "roth@wifa.de"</a:t>
+              <a:t> </a:t>
+            </a:r>
+            <a:r>
+              <a:rPr lang="de-DE" sz="2000" b="1" dirty="0">
+                <a:latin typeface="Courier New" panose="02070309020205020404" pitchFamily="49" charset="0"/>
+                <a:cs typeface="Courier New" panose="02070309020205020404" pitchFamily="49" charset="0"/>
+                <a:hlinkClick r:id="rId4"/>
+              </a:rPr>
+              <a:t>roth@wifa.de</a:t>
+            </a:r>
+            <a:br>
+              <a:rPr lang="de-DE" sz="2000" b="1" dirty="0">
+                <a:latin typeface="Courier New" panose="02070309020205020404" pitchFamily="49" charset="0"/>
+                <a:cs typeface="Courier New" panose="02070309020205020404" pitchFamily="49" charset="0"/>
+              </a:rPr>
+            </a:br>
+            <a:r>
+              <a:rPr lang="de-DE" sz="2000" b="1" dirty="0" err="1">
+                <a:latin typeface="Courier New" panose="02070309020205020404" pitchFamily="49" charset="0"/>
+                <a:cs typeface="Courier New" panose="02070309020205020404" pitchFamily="49" charset="0"/>
+              </a:rPr>
+              <a:t>git</a:t>
+            </a:r>
+            <a:r>
+              <a:rPr lang="de-DE" sz="2000" b="1" dirty="0">
+                <a:latin typeface="Courier New" panose="02070309020205020404" pitchFamily="49" charset="0"/>
+                <a:cs typeface="Courier New" panose="02070309020205020404" pitchFamily="49" charset="0"/>
+              </a:rPr>
+              <a:t> </a:t>
+            </a:r>
+            <a:r>
+              <a:rPr lang="de-DE" sz="2000" b="1" dirty="0" err="1">
+                <a:latin typeface="Courier New" panose="02070309020205020404" pitchFamily="49" charset="0"/>
+                <a:cs typeface="Courier New" panose="02070309020205020404" pitchFamily="49" charset="0"/>
+              </a:rPr>
+              <a:t>config</a:t>
+            </a:r>
+            <a:r>
+              <a:rPr lang="de-DE" sz="2000" b="1" dirty="0">
+                <a:latin typeface="Courier New" panose="02070309020205020404" pitchFamily="49" charset="0"/>
+                <a:cs typeface="Courier New" panose="02070309020205020404" pitchFamily="49" charset="0"/>
+              </a:rPr>
+              <a:t> --global –</a:t>
+            </a:r>
+            <a:r>
+              <a:rPr lang="de-DE" sz="2000" b="1" dirty="0" err="1">
+                <a:latin typeface="Courier New" panose="02070309020205020404" pitchFamily="49" charset="0"/>
+                <a:cs typeface="Courier New" panose="02070309020205020404" pitchFamily="49" charset="0"/>
+              </a:rPr>
+              <a:t>list</a:t>
+            </a:r>
+            <a:r>
+              <a:rPr lang="de-DE" sz="2000" b="1" dirty="0">
+                <a:latin typeface="Courier New" panose="02070309020205020404" pitchFamily="49" charset="0"/>
+                <a:cs typeface="Courier New" panose="02070309020205020404" pitchFamily="49" charset="0"/>
+              </a:rPr>
+              <a:t> (Anzeigen der </a:t>
+            </a:r>
+            <a:r>
+              <a:rPr lang="de-DE" sz="2000" b="1" dirty="0" err="1">
+                <a:latin typeface="Courier New" panose="02070309020205020404" pitchFamily="49" charset="0"/>
+                <a:cs typeface="Courier New" panose="02070309020205020404" pitchFamily="49" charset="0"/>
+              </a:rPr>
+              <a:t>Config</a:t>
+            </a:r>
+            <a:r>
+              <a:rPr lang="de-DE" sz="2000" b="1" dirty="0">
+                <a:latin typeface="Courier New" panose="02070309020205020404" pitchFamily="49" charset="0"/>
+                <a:cs typeface="Courier New" panose="02070309020205020404" pitchFamily="49" charset="0"/>
+              </a:rPr>
+              <a:t>)</a:t>
             </a:r>
           </a:p>
           <a:p>
@@ -10796,14 +10804,14 @@
           <p:nvPr/>
         </p:nvPicPr>
         <p:blipFill>
-          <a:blip r:embed="rId4"/>
+          <a:blip r:embed="rId5"/>
           <a:stretch>
             <a:fillRect/>
           </a:stretch>
         </p:blipFill>
         <p:spPr>
           <a:xfrm>
-            <a:off x="6084168" y="4653136"/>
+            <a:off x="6070859" y="4293096"/>
             <a:ext cx="3059832" cy="681448"/>
           </a:xfrm>
           <a:prstGeom prst="rect">
@@ -10917,7 +10925,7 @@
             </a:r>
             <a:r>
               <a:rPr lang="de-DE" sz="1600" dirty="0"/>
-              <a:t> (mindestens 1 Branch (</a:t>
+              <a:t> (mindestens ein Branch (</a:t>
             </a:r>
             <a:r>
               <a:rPr lang="de-DE" sz="1600" b="1" dirty="0" err="1">
@@ -10991,15 +10999,7 @@
             </a:r>
             <a:r>
               <a:rPr lang="de-DE" sz="1600" dirty="0"/>
-              <a:t>-Verzeichnis des Repository. Empfehlung: Für jedes Projekt in einem Hauptverzeichnis (z.B. REPO) Unterverzeichnisse (Working </a:t>
-            </a:r>
-            <a:r>
-              <a:rPr lang="de-DE" sz="1600" dirty="0" err="1"/>
-              <a:t>Directories</a:t>
-            </a:r>
-            <a:r>
-              <a:rPr lang="de-DE" sz="1600" dirty="0"/>
-              <a:t>) anlegen.</a:t>
+              <a:t>-Verzeichnis des Repository. Empfehlung: Für jedes Projekt in einem Hauptverzeichnis (z.B. REPO) einen Workspace (Verzeichnis) anlegen und dort das Repository erzeugen.</a:t>
             </a:r>
           </a:p>
           <a:p>
@@ -11070,6 +11070,10 @@
               <a:t>Checkout</a:t>
             </a:r>
             <a:r>
+              <a:rPr lang="de-DE" sz="1600" b="1" dirty="0"/>
+              <a:t>/Restore</a:t>
+            </a:r>
+            <a:r>
               <a:rPr lang="de-DE" sz="1600" dirty="0"/>
               <a:t>: "zurücksetzen" der Arbeitsdatei(en) auf eine andere Version aus dem Repository</a:t>
             </a:r>
@@ -11089,7 +11093,7 @@
             </a:r>
             <a:r>
               <a:rPr lang="de-DE" sz="1600" dirty="0"/>
-              <a:t>: "Abzweigung" eines Projektes, d.h. Kopie eine Projektes, das in eine andere Richtung entwickelt wird, ein anderer Entwicklungszweig (Jedes Repository enthält mindestens den "</a:t>
+              <a:t>: "Abzweigung" eines Projektes, d.h. Kopie eines Projektes, das in eine andere Richtung entwickelt wird, ein anderer Entwicklungszweig (Jedes Repository enthält mindestens den "</a:t>
             </a:r>
             <a:r>
               <a:rPr lang="de-DE" sz="1600" b="1" dirty="0" err="1"/>
@@ -11161,15 +11165,11 @@
             </a:pPr>
             <a:r>
               <a:rPr lang="de-DE" sz="1600" b="1" dirty="0"/>
-              <a:t>Pull / </a:t>
-            </a:r>
-            <a:r>
-              <a:rPr lang="de-DE" sz="1600" b="1" dirty="0" err="1"/>
-              <a:t>Clone</a:t>
+              <a:t>Pull / Clone</a:t>
             </a:r>
             <a:r>
               <a:rPr lang="de-DE" sz="1600" dirty="0"/>
-              <a:t>: Kopieren eines Remote-Projekts in das eigene, lokale Repository</a:t>
+              <a:t>: Kopieren eines Remote-Projekts (z.B. von github.com)  in das eigene, lokale Repository</a:t>
             </a:r>
           </a:p>
           <a:p>
@@ -11244,23 +11244,7 @@
             </a:r>
             <a:r>
               <a:rPr lang="de-DE" sz="1600" dirty="0"/>
-              <a:t>: Temporäres Ablegen des Working-</a:t>
-            </a:r>
-            <a:r>
-              <a:rPr lang="de-DE" sz="1600" dirty="0" err="1"/>
-              <a:t>Trees</a:t>
-            </a:r>
-            <a:r>
-              <a:rPr lang="de-DE" sz="1600" dirty="0"/>
-              <a:t> um später daran weiterzuarbeiten, dabei wird der Working-</a:t>
-            </a:r>
-            <a:r>
-              <a:rPr lang="de-DE" sz="1600" dirty="0" err="1"/>
-              <a:t>Tree</a:t>
-            </a:r>
-            <a:r>
-              <a:rPr lang="de-DE" sz="1600" dirty="0"/>
-              <a:t> auf den letzten Commit zurückgesetzt.</a:t>
+              <a:t>: Temporäres Ablegen des Working-Trees (Projektordner) um später daran weiterzuarbeiten, dabei wird der Working-Tree auf den letzten Commit zurückgesetzt.</a:t>
             </a:r>
           </a:p>
           <a:p>
@@ -11375,10 +11359,15 @@
             <p:ph idx="1"/>
           </p:nvPr>
         </p:nvSpPr>
-        <p:spPr/>
+        <p:spPr>
+          <a:xfrm>
+            <a:off x="457200" y="1268760"/>
+            <a:ext cx="8579296" cy="5589240"/>
+          </a:xfrm>
+        </p:spPr>
         <p:txBody>
           <a:bodyPr>
-            <a:normAutofit fontScale="92500" lnSpcReduction="10000"/>
+            <a:normAutofit fontScale="70000" lnSpcReduction="20000"/>
           </a:bodyPr>
           <a:lstStyle/>
           <a:p>
@@ -11415,8 +11404,69 @@
             </a:r>
             <a:r>
               <a:rPr lang="de-DE" dirty="0"/>
-              <a:t>erzeugen → Hier bearbeitest du deine Dateien (z.B. Quellcode).</a:t>
-            </a:r>
+              <a:t>erzeugen → Hier bearbeitest du deine Dateien (z.B. Quellcode). </a:t>
+            </a:r>
+            <a:br>
+              <a:rPr lang="de-DE" dirty="0"/>
+            </a:br>
+            <a:r>
+              <a:rPr lang="de-DE" u="sng" dirty="0"/>
+              <a:t>Alternative</a:t>
+            </a:r>
+            <a:r>
+              <a:rPr lang="de-DE" dirty="0"/>
+              <a:t>: Download eines Online </a:t>
+            </a:r>
+            <a:r>
+              <a:rPr lang="de-DE" dirty="0" err="1"/>
+              <a:t>Repositories</a:t>
+            </a:r>
+            <a:r>
+              <a:rPr lang="de-DE" dirty="0"/>
+              <a:t> mit: </a:t>
+            </a:r>
+            <a:br>
+              <a:rPr lang="de-DE" dirty="0"/>
+            </a:br>
+            <a:r>
+              <a:rPr lang="de-DE" sz="3100" b="1" dirty="0" err="1">
+                <a:latin typeface="Consolas" panose="020B0609020204030204" pitchFamily="49" charset="0"/>
+              </a:rPr>
+              <a:t>git</a:t>
+            </a:r>
+            <a:r>
+              <a:rPr lang="de-DE" sz="3100" b="1" dirty="0">
+                <a:latin typeface="Consolas" panose="020B0609020204030204" pitchFamily="49" charset="0"/>
+              </a:rPr>
+              <a:t> </a:t>
+            </a:r>
+            <a:r>
+              <a:rPr lang="de-DE" sz="3100" b="1" dirty="0" err="1">
+                <a:latin typeface="Consolas" panose="020B0609020204030204" pitchFamily="49" charset="0"/>
+              </a:rPr>
+              <a:t>clone</a:t>
+            </a:r>
+            <a:r>
+              <a:rPr lang="de-DE" sz="3100" b="1" dirty="0">
+                <a:latin typeface="Consolas" panose="020B0609020204030204" pitchFamily="49" charset="0"/>
+              </a:rPr>
+              <a:t> </a:t>
+            </a:r>
+            <a:r>
+              <a:rPr lang="de-DE" sz="3100" b="1" dirty="0">
+                <a:latin typeface="Consolas" panose="020B0609020204030204" pitchFamily="49" charset="0"/>
+                <a:hlinkClick r:id="rId2"/>
+              </a:rPr>
+              <a:t>https://github.com/user/projekt.git</a:t>
+            </a:r>
+            <a:br>
+              <a:rPr lang="de-DE" b="1" dirty="0">
+                <a:latin typeface="Consolas" panose="020B0609020204030204" pitchFamily="49" charset="0"/>
+              </a:rPr>
+            </a:br>
+            <a:endParaRPr lang="de-DE" b="1" dirty="0">
+              <a:latin typeface="Consolas" panose="020B0609020204030204" pitchFamily="49" charset="0"/>
+            </a:endParaRPr>
           </a:p>
           <a:p>
             <a:pPr marL="0" indent="0">
@@ -11472,6 +11522,10 @@
               <a:rPr lang="de-DE" dirty="0"/>
               <a:t> speichern/archivieren willst.</a:t>
             </a:r>
+            <a:br>
+              <a:rPr lang="de-DE" dirty="0"/>
+            </a:br>
+            <a:endParaRPr lang="de-DE" dirty="0"/>
           </a:p>
           <a:p>
             <a:pPr marL="0" indent="0">
@@ -11503,6 +11557,10 @@
               <a:rPr lang="de-DE" dirty="0"/>
               <a:t>)→ Du erstellst einen Snapshot (Version), der gespeichert wird.</a:t>
             </a:r>
+            <a:br>
+              <a:rPr lang="de-DE" dirty="0"/>
+            </a:br>
+            <a:endParaRPr lang="de-DE" dirty="0"/>
           </a:p>
           <a:p>
             <a:pPr marL="0" indent="0">
@@ -11518,7 +11576,7 @@
             </a:r>
             <a:r>
               <a:rPr lang="de-DE" dirty="0"/>
-              <a:t>: Remote Repository (</a:t>
+              <a:t>: Zum Remote Repository (</a:t>
             </a:r>
             <a:r>
               <a:rPr lang="de-DE" b="1" dirty="0" err="1">
@@ -11534,7 +11592,87 @@
             </a:r>
             <a:r>
               <a:rPr lang="de-DE" dirty="0"/>
-              <a:t>)→ Du schickst deine Änderungen z.B. zu GitHub.com → dort können andere sie abrufen.</a:t>
+              <a:t>)→ Du schickst deine committeten Änderungen z.B. zu GitHub.com → dort können andere sie abrufen.</a:t>
+            </a:r>
+          </a:p>
+          <a:p>
+            <a:pPr marL="0" indent="0" algn="ctr">
+              <a:buNone/>
+            </a:pPr>
+            <a:endParaRPr lang="de-DE" dirty="0"/>
+          </a:p>
+          <a:p>
+            <a:pPr marL="0" indent="0" algn="ctr">
+              <a:buNone/>
+            </a:pPr>
+            <a:r>
+              <a:rPr lang="de-DE" dirty="0"/>
+              <a:t>Merksatz:</a:t>
+            </a:r>
+          </a:p>
+          <a:p>
+            <a:pPr marL="0" indent="0" algn="ctr">
+              <a:buNone/>
+            </a:pPr>
+            <a:r>
+              <a:rPr lang="de-DE" b="1" dirty="0" err="1">
+                <a:highlight>
+                  <a:srgbClr val="FFFF00"/>
+                </a:highlight>
+                <a:latin typeface="Courier New" panose="02070309020205020404" pitchFamily="49" charset="0"/>
+                <a:cs typeface="Courier New" panose="02070309020205020404" pitchFamily="49" charset="0"/>
+              </a:rPr>
+              <a:t>init</a:t>
+            </a:r>
+            <a:r>
+              <a:rPr lang="de-DE" b="1" dirty="0">
+                <a:highlight>
+                  <a:srgbClr val="FFFF00"/>
+                </a:highlight>
+                <a:latin typeface="Courier New" panose="02070309020205020404" pitchFamily="49" charset="0"/>
+                <a:cs typeface="Courier New" panose="02070309020205020404" pitchFamily="49" charset="0"/>
+              </a:rPr>
+              <a:t> -&gt; Bearbeiten -&gt; </a:t>
+            </a:r>
+            <a:r>
+              <a:rPr lang="de-DE" b="1" dirty="0" err="1">
+                <a:highlight>
+                  <a:srgbClr val="FFFF00"/>
+                </a:highlight>
+                <a:latin typeface="Courier New" panose="02070309020205020404" pitchFamily="49" charset="0"/>
+                <a:cs typeface="Courier New" panose="02070309020205020404" pitchFamily="49" charset="0"/>
+              </a:rPr>
+              <a:t>add</a:t>
+            </a:r>
+            <a:r>
+              <a:rPr lang="de-DE" b="1" dirty="0">
+                <a:highlight>
+                  <a:srgbClr val="FFFF00"/>
+                </a:highlight>
+                <a:latin typeface="Courier New" panose="02070309020205020404" pitchFamily="49" charset="0"/>
+                <a:cs typeface="Courier New" panose="02070309020205020404" pitchFamily="49" charset="0"/>
+              </a:rPr>
+              <a:t> -&gt; </a:t>
+            </a:r>
+            <a:r>
+              <a:rPr lang="de-DE" b="1" dirty="0" err="1">
+                <a:highlight>
+                  <a:srgbClr val="FFFF00"/>
+                </a:highlight>
+                <a:latin typeface="Courier New" panose="02070309020205020404" pitchFamily="49" charset="0"/>
+                <a:cs typeface="Courier New" panose="02070309020205020404" pitchFamily="49" charset="0"/>
+              </a:rPr>
+              <a:t>commit</a:t>
+            </a:r>
+            <a:r>
+              <a:rPr lang="de-DE" b="1" dirty="0">
+                <a:highlight>
+                  <a:srgbClr val="FFFF00"/>
+                </a:highlight>
+                <a:latin typeface="Courier New" panose="02070309020205020404" pitchFamily="49" charset="0"/>
+                <a:cs typeface="Courier New" panose="02070309020205020404" pitchFamily="49" charset="0"/>
+              </a:rPr>
+              <a:t> -&gt; push</a:t>
             </a:r>
           </a:p>
         </p:txBody>
@@ -12201,18 +12339,39 @@
           <a:p>
             <a:pPr algn="ctr"/>
             <a:r>
-              <a:rPr lang="de-DE"/>
+              <a:rPr lang="de-DE" dirty="0"/>
               <a:t>Unerwünschte Änderungen an Datei(en) zurücknehmen mit</a:t>
             </a:r>
           </a:p>
           <a:p>
             <a:pPr algn="ctr"/>
             <a:r>
-              <a:rPr lang="de-DE" sz="1600" b="1">
-                <a:latin typeface="Courier New" panose="02070309020205020404" pitchFamily="49" charset="0"/>
-                <a:cs typeface="Courier New" panose="02070309020205020404" pitchFamily="49" charset="0"/>
-              </a:rPr>
-              <a:t>git checkout &lt;dateiname&gt;</a:t>
+              <a:rPr lang="de-DE" sz="1600" b="1" dirty="0" err="1">
+                <a:latin typeface="Courier New" panose="02070309020205020404" pitchFamily="49" charset="0"/>
+                <a:cs typeface="Courier New" panose="02070309020205020404" pitchFamily="49" charset="0"/>
+              </a:rPr>
+              <a:t>git</a:t>
+            </a:r>
+            <a:r>
+              <a:rPr lang="de-DE" sz="1600" b="1" dirty="0">
+                <a:latin typeface="Courier New" panose="02070309020205020404" pitchFamily="49" charset="0"/>
+                <a:cs typeface="Courier New" panose="02070309020205020404" pitchFamily="49" charset="0"/>
+              </a:rPr>
+              <a:t> restore &lt;</a:t>
+            </a:r>
+            <a:r>
+              <a:rPr lang="de-DE" sz="1600" b="1" dirty="0" err="1">
+                <a:latin typeface="Courier New" panose="02070309020205020404" pitchFamily="49" charset="0"/>
+                <a:cs typeface="Courier New" panose="02070309020205020404" pitchFamily="49" charset="0"/>
+              </a:rPr>
+              <a:t>dateiname</a:t>
+            </a:r>
+            <a:r>
+              <a:rPr lang="de-DE" sz="1600" b="1" dirty="0">
+                <a:latin typeface="Courier New" panose="02070309020205020404" pitchFamily="49" charset="0"/>
+                <a:cs typeface="Courier New" panose="02070309020205020404" pitchFamily="49" charset="0"/>
+              </a:rPr>
+              <a:t>&gt;</a:t>
             </a:r>
           </a:p>
         </p:txBody>

--- a/Git.pptx
+++ b/Git.pptx
@@ -230,7 +230,7 @@
           <a:p>
             <a:fld id="{53FDF33E-3C65-4C97-B984-5E296FC62525}" type="datetimeFigureOut">
               <a:rPr lang="de-DE" smtClean="0"/>
-              <a:t>07.07.2026</a:t>
+              <a:t>10.07.2026</a:t>
             </a:fld>
             <a:endParaRPr lang="de-DE"/>
           </a:p>
@@ -760,7 +760,7 @@
           <a:p>
             <a:fld id="{94818ED8-3753-490C-B819-473C9754FE47}" type="datetimeFigureOut">
               <a:rPr lang="de-DE" smtClean="0"/>
-              <a:t>07.07.2026</a:t>
+              <a:t>10.07.2026</a:t>
             </a:fld>
             <a:endParaRPr lang="de-DE"/>
           </a:p>
@@ -928,7 +928,7 @@
           <a:p>
             <a:fld id="{94818ED8-3753-490C-B819-473C9754FE47}" type="datetimeFigureOut">
               <a:rPr lang="de-DE" smtClean="0"/>
-              <a:t>07.07.2026</a:t>
+              <a:t>10.07.2026</a:t>
             </a:fld>
             <a:endParaRPr lang="de-DE"/>
           </a:p>
@@ -1106,7 +1106,7 @@
           <a:p>
             <a:fld id="{94818ED8-3753-490C-B819-473C9754FE47}" type="datetimeFigureOut">
               <a:rPr lang="de-DE" smtClean="0"/>
-              <a:t>07.07.2026</a:t>
+              <a:t>10.07.2026</a:t>
             </a:fld>
             <a:endParaRPr lang="de-DE"/>
           </a:p>
@@ -1289,7 +1289,7 @@
           <a:p>
             <a:fld id="{94818ED8-3753-490C-B819-473C9754FE47}" type="datetimeFigureOut">
               <a:rPr lang="de-DE" smtClean="0"/>
-              <a:t>07.07.2026</a:t>
+              <a:t>10.07.2026</a:t>
             </a:fld>
             <a:endParaRPr lang="de-DE"/>
           </a:p>
@@ -1575,7 +1575,7 @@
           <a:p>
             <a:fld id="{94818ED8-3753-490C-B819-473C9754FE47}" type="datetimeFigureOut">
               <a:rPr lang="de-DE" smtClean="0"/>
-              <a:t>07.07.2026</a:t>
+              <a:t>10.07.2026</a:t>
             </a:fld>
             <a:endParaRPr lang="de-DE"/>
           </a:p>
@@ -1860,7 +1860,7 @@
           <a:p>
             <a:fld id="{94818ED8-3753-490C-B819-473C9754FE47}" type="datetimeFigureOut">
               <a:rPr lang="de-DE" smtClean="0"/>
-              <a:t>07.07.2026</a:t>
+              <a:t>10.07.2026</a:t>
             </a:fld>
             <a:endParaRPr lang="de-DE"/>
           </a:p>
@@ -2279,7 +2279,7 @@
           <a:p>
             <a:fld id="{94818ED8-3753-490C-B819-473C9754FE47}" type="datetimeFigureOut">
               <a:rPr lang="de-DE" smtClean="0"/>
-              <a:t>07.07.2026</a:t>
+              <a:t>10.07.2026</a:t>
             </a:fld>
             <a:endParaRPr lang="de-DE"/>
           </a:p>
@@ -2396,7 +2396,7 @@
           <a:p>
             <a:fld id="{94818ED8-3753-490C-B819-473C9754FE47}" type="datetimeFigureOut">
               <a:rPr lang="de-DE" smtClean="0"/>
-              <a:t>07.07.2026</a:t>
+              <a:t>10.07.2026</a:t>
             </a:fld>
             <a:endParaRPr lang="de-DE"/>
           </a:p>
@@ -2491,7 +2491,7 @@
           <a:p>
             <a:fld id="{94818ED8-3753-490C-B819-473C9754FE47}" type="datetimeFigureOut">
               <a:rPr lang="de-DE" smtClean="0"/>
-              <a:t>07.07.2026</a:t>
+              <a:t>10.07.2026</a:t>
             </a:fld>
             <a:endParaRPr lang="de-DE"/>
           </a:p>
@@ -2766,7 +2766,7 @@
           <a:p>
             <a:fld id="{94818ED8-3753-490C-B819-473C9754FE47}" type="datetimeFigureOut">
               <a:rPr lang="de-DE" smtClean="0"/>
-              <a:t>07.07.2026</a:t>
+              <a:t>10.07.2026</a:t>
             </a:fld>
             <a:endParaRPr lang="de-DE"/>
           </a:p>
@@ -3018,7 +3018,7 @@
           <a:p>
             <a:fld id="{94818ED8-3753-490C-B819-473C9754FE47}" type="datetimeFigureOut">
               <a:rPr lang="de-DE" smtClean="0"/>
-              <a:t>07.07.2026</a:t>
+              <a:t>10.07.2026</a:t>
             </a:fld>
             <a:endParaRPr lang="de-DE"/>
           </a:p>
@@ -3229,7 +3229,7 @@
           <a:p>
             <a:fld id="{94818ED8-3753-490C-B819-473C9754FE47}" type="datetimeFigureOut">
               <a:rPr lang="de-DE" smtClean="0"/>
-              <a:t>07.07.2026</a:t>
+              <a:t>10.07.2026</a:t>
             </a:fld>
             <a:endParaRPr lang="de-DE"/>
           </a:p>
@@ -10682,21 +10682,21 @@
                 <a:latin typeface="Courier New" panose="02070309020205020404" pitchFamily="49" charset="0"/>
                 <a:cs typeface="Courier New" panose="02070309020205020404" pitchFamily="49" charset="0"/>
               </a:rPr>
-              <a:t> --global –</a:t>
-            </a:r>
-            <a:r>
-              <a:rPr lang="de-DE" sz="2000" b="1" dirty="0" err="1">
-                <a:latin typeface="Courier New" panose="02070309020205020404" pitchFamily="49" charset="0"/>
-                <a:cs typeface="Courier New" panose="02070309020205020404" pitchFamily="49" charset="0"/>
-              </a:rPr>
-              <a:t>list</a:t>
+              <a:t> --</a:t>
+            </a:r>
+            <a:r>
+              <a:rPr lang="de-DE" sz="2000" b="1">
+                <a:latin typeface="Courier New" panose="02070309020205020404" pitchFamily="49" charset="0"/>
+                <a:cs typeface="Courier New" panose="02070309020205020404" pitchFamily="49" charset="0"/>
+              </a:rPr>
+              <a:t>global –-list </a:t>
             </a:r>
             <a:r>
               <a:rPr lang="de-DE" sz="2000" b="1" dirty="0">
                 <a:latin typeface="Courier New" panose="02070309020205020404" pitchFamily="49" charset="0"/>
                 <a:cs typeface="Courier New" panose="02070309020205020404" pitchFamily="49" charset="0"/>
               </a:rPr>
-              <a:t> (Anzeigen der </a:t>
+              <a:t>(Anzeigen der </a:t>
             </a:r>
             <a:r>
               <a:rPr lang="de-DE" sz="2000" b="1" dirty="0" err="1">
